--- a/cursos/recursos/formacion-ajedrez/03-apendices-y-normativa-jde.pptx
+++ b/cursos/recursos/formacion-ajedrez/03-apendices-y-normativa-jde.pptx
@@ -10,6 +10,22 @@
     <p:sldId id="258" r:id="rId9"/>
     <p:sldId id="259" r:id="rId10"/>
     <p:sldId id="260" r:id="rId11"/>
+    <p:sldId id="261" r:id="rId12"/>
+    <p:sldId id="262" r:id="rId13"/>
+    <p:sldId id="263" r:id="rId14"/>
+    <p:sldId id="264" r:id="rId15"/>
+    <p:sldId id="265" r:id="rId16"/>
+    <p:sldId id="266" r:id="rId17"/>
+    <p:sldId id="267" r:id="rId18"/>
+    <p:sldId id="268" r:id="rId19"/>
+    <p:sldId id="269" r:id="rId20"/>
+    <p:sldId id="270" r:id="rId21"/>
+    <p:sldId id="271" r:id="rId22"/>
+    <p:sldId id="272" r:id="rId23"/>
+    <p:sldId id="273" r:id="rId24"/>
+    <p:sldId id="274" r:id="rId25"/>
+    <p:sldId id="275" r:id="rId26"/>
+    <p:sldId id="276" r:id="rId27"/>
   </p:sldIdLst>
   <p:sldSz cx="12191695" cy="6858000" type="screen4x3"/>
   <p:notesSz cx="6858000" cy="9144000"/>
@@ -3481,6 +3497,2212 @@
 </p:sld>
 </file>
 
+<file path=ppt/slides/slide10.xml><?xml version="1.0" encoding="utf-8"?>
+<p:sld xmlns:a="http://schemas.openxmlformats.org/drawingml/2006/main" xmlns:p="http://schemas.openxmlformats.org/presentationml/2006/main" xmlns:r="http://schemas.openxmlformats.org/officeDocument/2006/relationships">
+  <p:cSld>
+    <p:spTree>
+      <p:nvGrpSpPr>
+        <p:cNvPr id="1" name=""/>
+        <p:cNvGrpSpPr/>
+        <p:nvPr/>
+      </p:nvGrpSpPr>
+      <p:grpSpPr/>
+      <p:sp>
+        <p:nvSpPr>
+          <p:cNvPr id="2" name="Rectangle 1"/>
+          <p:cNvSpPr/>
+          <p:nvPr/>
+        </p:nvSpPr>
+        <p:spPr>
+          <a:xfrm>
+            <a:off x="0" y="0"/>
+            <a:ext cx="12191695" cy="6858000"/>
+          </a:xfrm>
+          <a:prstGeom prst="rect">
+            <a:avLst/>
+          </a:prstGeom>
+          <a:solidFill>
+            <a:srgbClr val="102A43"/>
+          </a:solidFill>
+          <a:ln>
+            <a:noFill/>
+          </a:ln>
+          <a:effectLst/>
+        </p:spPr>
+        <p:style>
+          <a:lnRef idx="1">
+            <a:schemeClr val="accent1"/>
+          </a:lnRef>
+          <a:fillRef idx="3">
+            <a:schemeClr val="accent1"/>
+          </a:fillRef>
+          <a:effectRef idx="2">
+            <a:schemeClr val="accent1"/>
+          </a:effectRef>
+          <a:fontRef idx="minor">
+            <a:schemeClr val="lt1"/>
+          </a:fontRef>
+        </p:style>
+        <p:txBody>
+          <a:bodyPr rtlCol="0" anchor="ctr"/>
+          <a:lstStyle/>
+          <a:p>
+            <a:pPr algn="ctr"/>
+          </a:p>
+        </p:txBody>
+      </p:sp>
+      <p:sp>
+        <p:nvSpPr>
+          <p:cNvPr id="3" name="TextBox 2"/>
+          <p:cNvSpPr txBox="1"/>
+          <p:nvPr/>
+        </p:nvSpPr>
+        <p:spPr>
+          <a:xfrm>
+            <a:off x="548640" y="548640"/>
+            <a:ext cx="11064240" cy="457200"/>
+          </a:xfrm>
+          <a:prstGeom prst="rect">
+            <a:avLst/>
+          </a:prstGeom>
+          <a:noFill/>
+        </p:spPr>
+        <p:txBody>
+          <a:bodyPr wrap="square">
+            <a:spAutoFit/>
+          </a:bodyPr>
+          <a:lstStyle/>
+          <a:p>
+            <a:r>
+              <a:rPr sz="1400" b="1">
+                <a:solidFill>
+                  <a:srgbClr val="F0B429"/>
+                </a:solidFill>
+                <a:latin typeface="Calibri"/>
+              </a:rPr>
+              <a:t>CASO 1 · DECISIÓN</a:t>
+            </a:r>
+          </a:p>
+        </p:txBody>
+      </p:sp>
+      <p:sp>
+        <p:nvSpPr>
+          <p:cNvPr id="4" name="TextBox 3"/>
+          <p:cNvSpPr txBox="1"/>
+          <p:nvPr/>
+        </p:nvSpPr>
+        <p:spPr>
+          <a:xfrm>
+            <a:off x="548640" y="1051560"/>
+            <a:ext cx="11064240" cy="822960"/>
+          </a:xfrm>
+          <a:prstGeom prst="rect">
+            <a:avLst/>
+          </a:prstGeom>
+          <a:noFill/>
+        </p:spPr>
+        <p:txBody>
+          <a:bodyPr wrap="square">
+            <a:spAutoFit/>
+          </a:bodyPr>
+          <a:lstStyle/>
+          <a:p>
+            <a:r>
+              <a:rPr sz="2600" b="1">
+                <a:solidFill>
+                  <a:srgbClr val="FFFFFF"/>
+                </a:solidFill>
+                <a:latin typeface="Cambria"/>
+              </a:rPr>
+              <a:t>¿Rápidas o relámpago?</a:t>
+            </a:r>
+          </a:p>
+        </p:txBody>
+      </p:sp>
+      <p:sp>
+        <p:nvSpPr>
+          <p:cNvPr id="5" name="TextBox 4"/>
+          <p:cNvSpPr txBox="1"/>
+          <p:nvPr/>
+        </p:nvSpPr>
+        <p:spPr>
+          <a:xfrm>
+            <a:off x="548640" y="2103120"/>
+            <a:ext cx="11064240" cy="3931920"/>
+          </a:xfrm>
+          <a:prstGeom prst="rect">
+            <a:avLst/>
+          </a:prstGeom>
+          <a:noFill/>
+        </p:spPr>
+        <p:txBody>
+          <a:bodyPr wrap="square">
+            <a:spAutoFit/>
+          </a:bodyPr>
+          <a:lstStyle/>
+          <a:p>
+            <a:r>
+              <a:rPr sz="2000" b="0">
+                <a:solidFill>
+                  <a:srgbClr val="CADCFC"/>
+                </a:solidFill>
+                <a:latin typeface="Calibri"/>
+              </a:rPr>
+              <a:t>5 + 60 × 3 s = 5 + 3 = 8 minutos: es relámpago, porque no pasa de 10 minutos.</a:t>
+            </a:r>
+          </a:p>
+        </p:txBody>
+      </p:sp>
+      <p:sp>
+        <p:nvSpPr>
+          <p:cNvPr id="6" name="TextBox 5"/>
+          <p:cNvSpPr txBox="1"/>
+          <p:nvPr/>
+        </p:nvSpPr>
+        <p:spPr>
+          <a:xfrm>
+            <a:off x="548640" y="6263640"/>
+            <a:ext cx="11064240" cy="365760"/>
+          </a:xfrm>
+          <a:prstGeom prst="rect">
+            <a:avLst/>
+          </a:prstGeom>
+          <a:noFill/>
+        </p:spPr>
+        <p:txBody>
+          <a:bodyPr wrap="square">
+            <a:spAutoFit/>
+          </a:bodyPr>
+          <a:lstStyle/>
+          <a:p>
+            <a:r>
+              <a:rPr sz="1100" b="0">
+                <a:solidFill>
+                  <a:srgbClr val="9FB3C8"/>
+                </a:solidFill>
+                <a:latin typeface="Calibri"/>
+              </a:rPr>
+              <a:t>Fuente: Leyes del Ajedrez 2023 (Handbook E.I.01), apéndice B.1</a:t>
+            </a:r>
+          </a:p>
+        </p:txBody>
+      </p:sp>
+    </p:spTree>
+  </p:cSld>
+  <p:clrMapOvr>
+    <a:masterClrMapping/>
+  </p:clrMapOvr>
+</p:sld>
+</file>
+
+<file path=ppt/slides/slide11.xml><?xml version="1.0" encoding="utf-8"?>
+<p:sld xmlns:a="http://schemas.openxmlformats.org/drawingml/2006/main" xmlns:p="http://schemas.openxmlformats.org/presentationml/2006/main" xmlns:r="http://schemas.openxmlformats.org/officeDocument/2006/relationships">
+  <p:cSld>
+    <p:spTree>
+      <p:nvGrpSpPr>
+        <p:cNvPr id="1" name=""/>
+        <p:cNvGrpSpPr/>
+        <p:nvPr/>
+      </p:nvGrpSpPr>
+      <p:grpSpPr/>
+      <p:sp>
+        <p:nvSpPr>
+          <p:cNvPr id="2" name="Oval 1"/>
+          <p:cNvSpPr/>
+          <p:nvPr/>
+        </p:nvSpPr>
+        <p:spPr>
+          <a:xfrm>
+            <a:off x="548640" y="502920"/>
+            <a:ext cx="502920" cy="502920"/>
+          </a:xfrm>
+          <a:prstGeom prst="ellipse">
+            <a:avLst/>
+          </a:prstGeom>
+          <a:solidFill>
+            <a:srgbClr val="DE911D"/>
+          </a:solidFill>
+          <a:ln>
+            <a:noFill/>
+          </a:ln>
+          <a:effectLst/>
+        </p:spPr>
+        <p:style>
+          <a:lnRef idx="1">
+            <a:schemeClr val="accent1"/>
+          </a:lnRef>
+          <a:fillRef idx="3">
+            <a:schemeClr val="accent1"/>
+          </a:fillRef>
+          <a:effectRef idx="2">
+            <a:schemeClr val="accent1"/>
+          </a:effectRef>
+          <a:fontRef idx="minor">
+            <a:schemeClr val="lt1"/>
+          </a:fontRef>
+        </p:style>
+        <p:txBody>
+          <a:bodyPr rtlCol="0" anchor="ctr"/>
+          <a:lstStyle/>
+          <a:p>
+            <a:pPr algn="ctr"/>
+          </a:p>
+        </p:txBody>
+      </p:sp>
+      <p:sp>
+        <p:nvSpPr>
+          <p:cNvPr id="3" name="TextBox 2"/>
+          <p:cNvSpPr txBox="1"/>
+          <p:nvPr/>
+        </p:nvSpPr>
+        <p:spPr>
+          <a:xfrm>
+            <a:off x="548640" y="502920"/>
+            <a:ext cx="502920" cy="502920"/>
+          </a:xfrm>
+          <a:prstGeom prst="rect">
+            <a:avLst/>
+          </a:prstGeom>
+          <a:noFill/>
+        </p:spPr>
+        <p:txBody>
+          <a:bodyPr wrap="square">
+            <a:spAutoFit/>
+          </a:bodyPr>
+          <a:lstStyle/>
+          <a:p>
+            <a:pPr algn="ctr"/>
+            <a:r>
+              <a:rPr sz="2000" b="0">
+                <a:solidFill>
+                  <a:srgbClr val="0A1F33"/>
+                </a:solidFill>
+                <a:latin typeface="Calibri"/>
+              </a:rPr>
+              <a:t>?</a:t>
+            </a:r>
+          </a:p>
+        </p:txBody>
+      </p:sp>
+      <p:sp>
+        <p:nvSpPr>
+          <p:cNvPr id="4" name="TextBox 3"/>
+          <p:cNvSpPr txBox="1"/>
+          <p:nvPr/>
+        </p:nvSpPr>
+        <p:spPr>
+          <a:xfrm>
+            <a:off x="1234440" y="530352"/>
+            <a:ext cx="9144000" cy="457200"/>
+          </a:xfrm>
+          <a:prstGeom prst="rect">
+            <a:avLst/>
+          </a:prstGeom>
+          <a:noFill/>
+        </p:spPr>
+        <p:txBody>
+          <a:bodyPr wrap="square">
+            <a:spAutoFit/>
+          </a:bodyPr>
+          <a:lstStyle/>
+          <a:p>
+            <a:r>
+              <a:rPr sz="1400" b="1">
+                <a:solidFill>
+                  <a:srgbClr val="DE911D"/>
+                </a:solidFill>
+                <a:latin typeface="Calibri"/>
+              </a:rPr>
+              <a:t>CASO 2 · ¿QUÉ DECIDE LA PERSONA ÁRBITRA?</a:t>
+            </a:r>
+          </a:p>
+        </p:txBody>
+      </p:sp>
+      <p:sp>
+        <p:nvSpPr>
+          <p:cNvPr id="5" name="TextBox 4"/>
+          <p:cNvSpPr txBox="1"/>
+          <p:nvPr/>
+        </p:nvSpPr>
+        <p:spPr>
+          <a:xfrm>
+            <a:off x="548640" y="1051560"/>
+            <a:ext cx="11064240" cy="822960"/>
+          </a:xfrm>
+          <a:prstGeom prst="rect">
+            <a:avLst/>
+          </a:prstGeom>
+          <a:noFill/>
+        </p:spPr>
+        <p:txBody>
+          <a:bodyPr wrap="square">
+            <a:spAutoFit/>
+          </a:bodyPr>
+          <a:lstStyle/>
+          <a:p>
+            <a:r>
+              <a:rPr sz="2600" b="1">
+                <a:solidFill>
+                  <a:srgbClr val="0A1F33"/>
+                </a:solidFill>
+                <a:latin typeface="Cambria"/>
+              </a:rPr>
+              <a:t>Justo en el límite</a:t>
+            </a:r>
+          </a:p>
+        </p:txBody>
+      </p:sp>
+      <p:sp>
+        <p:nvSpPr>
+          <p:cNvPr id="6" name="Rectangle 5"/>
+          <p:cNvSpPr/>
+          <p:nvPr/>
+        </p:nvSpPr>
+        <p:spPr>
+          <a:xfrm>
+            <a:off x="548640" y="1965960"/>
+            <a:ext cx="11064240" cy="4206240"/>
+          </a:xfrm>
+          <a:prstGeom prst="rect">
+            <a:avLst/>
+          </a:prstGeom>
+          <a:solidFill>
+            <a:srgbClr val="F0F4F8"/>
+          </a:solidFill>
+          <a:ln>
+            <a:noFill/>
+          </a:ln>
+          <a:effectLst/>
+        </p:spPr>
+        <p:style>
+          <a:lnRef idx="1">
+            <a:schemeClr val="accent1"/>
+          </a:lnRef>
+          <a:fillRef idx="3">
+            <a:schemeClr val="accent1"/>
+          </a:fillRef>
+          <a:effectRef idx="2">
+            <a:schemeClr val="accent1"/>
+          </a:effectRef>
+          <a:fontRef idx="minor">
+            <a:schemeClr val="lt1"/>
+          </a:fontRef>
+        </p:style>
+        <p:txBody>
+          <a:bodyPr rtlCol="0" anchor="ctr"/>
+          <a:lstStyle/>
+          <a:p>
+            <a:pPr algn="ctr"/>
+          </a:p>
+        </p:txBody>
+      </p:sp>
+      <p:sp>
+        <p:nvSpPr>
+          <p:cNvPr id="7" name="TextBox 6"/>
+          <p:cNvSpPr txBox="1"/>
+          <p:nvPr/>
+        </p:nvSpPr>
+        <p:spPr>
+          <a:xfrm>
+            <a:off x="914400" y="2240280"/>
+            <a:ext cx="10332720" cy="3749039"/>
+          </a:xfrm>
+          <a:prstGeom prst="rect">
+            <a:avLst/>
+          </a:prstGeom>
+          <a:noFill/>
+        </p:spPr>
+        <p:txBody>
+          <a:bodyPr wrap="square">
+            <a:spAutoFit/>
+          </a:bodyPr>
+          <a:lstStyle/>
+          <a:p>
+            <a:r>
+              <a:rPr sz="2000" b="0">
+                <a:solidFill>
+                  <a:srgbClr val="334E68"/>
+                </a:solidFill>
+                <a:latin typeface="Calibri"/>
+              </a:rPr>
+              <a:t>Un torneo se anuncia a 45 minutos más 15 segundos.</a:t>
+            </a:r>
+          </a:p>
+        </p:txBody>
+      </p:sp>
+    </p:spTree>
+  </p:cSld>
+  <p:clrMapOvr>
+    <a:masterClrMapping/>
+  </p:clrMapOvr>
+</p:sld>
+</file>
+
+<file path=ppt/slides/slide12.xml><?xml version="1.0" encoding="utf-8"?>
+<p:sld xmlns:a="http://schemas.openxmlformats.org/drawingml/2006/main" xmlns:p="http://schemas.openxmlformats.org/presentationml/2006/main" xmlns:r="http://schemas.openxmlformats.org/officeDocument/2006/relationships">
+  <p:cSld>
+    <p:spTree>
+      <p:nvGrpSpPr>
+        <p:cNvPr id="1" name=""/>
+        <p:cNvGrpSpPr/>
+        <p:nvPr/>
+      </p:nvGrpSpPr>
+      <p:grpSpPr/>
+      <p:sp>
+        <p:nvSpPr>
+          <p:cNvPr id="2" name="Rectangle 1"/>
+          <p:cNvSpPr/>
+          <p:nvPr/>
+        </p:nvSpPr>
+        <p:spPr>
+          <a:xfrm>
+            <a:off x="0" y="0"/>
+            <a:ext cx="12191695" cy="6858000"/>
+          </a:xfrm>
+          <a:prstGeom prst="rect">
+            <a:avLst/>
+          </a:prstGeom>
+          <a:solidFill>
+            <a:srgbClr val="102A43"/>
+          </a:solidFill>
+          <a:ln>
+            <a:noFill/>
+          </a:ln>
+          <a:effectLst/>
+        </p:spPr>
+        <p:style>
+          <a:lnRef idx="1">
+            <a:schemeClr val="accent1"/>
+          </a:lnRef>
+          <a:fillRef idx="3">
+            <a:schemeClr val="accent1"/>
+          </a:fillRef>
+          <a:effectRef idx="2">
+            <a:schemeClr val="accent1"/>
+          </a:effectRef>
+          <a:fontRef idx="minor">
+            <a:schemeClr val="lt1"/>
+          </a:fontRef>
+        </p:style>
+        <p:txBody>
+          <a:bodyPr rtlCol="0" anchor="ctr"/>
+          <a:lstStyle/>
+          <a:p>
+            <a:pPr algn="ctr"/>
+          </a:p>
+        </p:txBody>
+      </p:sp>
+      <p:sp>
+        <p:nvSpPr>
+          <p:cNvPr id="3" name="TextBox 2"/>
+          <p:cNvSpPr txBox="1"/>
+          <p:nvPr/>
+        </p:nvSpPr>
+        <p:spPr>
+          <a:xfrm>
+            <a:off x="548640" y="548640"/>
+            <a:ext cx="11064240" cy="457200"/>
+          </a:xfrm>
+          <a:prstGeom prst="rect">
+            <a:avLst/>
+          </a:prstGeom>
+          <a:noFill/>
+        </p:spPr>
+        <p:txBody>
+          <a:bodyPr wrap="square">
+            <a:spAutoFit/>
+          </a:bodyPr>
+          <a:lstStyle/>
+          <a:p>
+            <a:r>
+              <a:rPr sz="1400" b="1">
+                <a:solidFill>
+                  <a:srgbClr val="F0B429"/>
+                </a:solidFill>
+                <a:latin typeface="Calibri"/>
+              </a:rPr>
+              <a:t>CASO 2 · DECISIÓN</a:t>
+            </a:r>
+          </a:p>
+        </p:txBody>
+      </p:sp>
+      <p:sp>
+        <p:nvSpPr>
+          <p:cNvPr id="4" name="TextBox 3"/>
+          <p:cNvSpPr txBox="1"/>
+          <p:nvPr/>
+        </p:nvSpPr>
+        <p:spPr>
+          <a:xfrm>
+            <a:off x="548640" y="1051560"/>
+            <a:ext cx="11064240" cy="822960"/>
+          </a:xfrm>
+          <a:prstGeom prst="rect">
+            <a:avLst/>
+          </a:prstGeom>
+          <a:noFill/>
+        </p:spPr>
+        <p:txBody>
+          <a:bodyPr wrap="square">
+            <a:spAutoFit/>
+          </a:bodyPr>
+          <a:lstStyle/>
+          <a:p>
+            <a:r>
+              <a:rPr sz="2600" b="1">
+                <a:solidFill>
+                  <a:srgbClr val="FFFFFF"/>
+                </a:solidFill>
+                <a:latin typeface="Cambria"/>
+              </a:rPr>
+              <a:t>Justo en el límite</a:t>
+            </a:r>
+          </a:p>
+        </p:txBody>
+      </p:sp>
+      <p:sp>
+        <p:nvSpPr>
+          <p:cNvPr id="5" name="TextBox 4"/>
+          <p:cNvSpPr txBox="1"/>
+          <p:nvPr/>
+        </p:nvSpPr>
+        <p:spPr>
+          <a:xfrm>
+            <a:off x="548640" y="2103120"/>
+            <a:ext cx="11064240" cy="3931920"/>
+          </a:xfrm>
+          <a:prstGeom prst="rect">
+            <a:avLst/>
+          </a:prstGeom>
+          <a:noFill/>
+        </p:spPr>
+        <p:txBody>
+          <a:bodyPr wrap="square">
+            <a:spAutoFit/>
+          </a:bodyPr>
+          <a:lstStyle/>
+          <a:p>
+            <a:r>
+              <a:rPr sz="2000" b="0">
+                <a:solidFill>
+                  <a:srgbClr val="CADCFC"/>
+                </a:solidFill>
+                <a:latin typeface="Calibri"/>
+              </a:rPr>
+              <a:t>45 + 15 = 60 minutos. Las rápidas son de más de 10 y menos de 60, así que este ritmo ya es clásico.</a:t>
+            </a:r>
+          </a:p>
+        </p:txBody>
+      </p:sp>
+      <p:sp>
+        <p:nvSpPr>
+          <p:cNvPr id="6" name="TextBox 5"/>
+          <p:cNvSpPr txBox="1"/>
+          <p:nvPr/>
+        </p:nvSpPr>
+        <p:spPr>
+          <a:xfrm>
+            <a:off x="548640" y="6263640"/>
+            <a:ext cx="11064240" cy="365760"/>
+          </a:xfrm>
+          <a:prstGeom prst="rect">
+            <a:avLst/>
+          </a:prstGeom>
+          <a:noFill/>
+        </p:spPr>
+        <p:txBody>
+          <a:bodyPr wrap="square">
+            <a:spAutoFit/>
+          </a:bodyPr>
+          <a:lstStyle/>
+          <a:p>
+            <a:r>
+              <a:rPr sz="1100" b="0">
+                <a:solidFill>
+                  <a:srgbClr val="9FB3C8"/>
+                </a:solidFill>
+                <a:latin typeface="Calibri"/>
+              </a:rPr>
+              <a:t>Fuente: Leyes del Ajedrez 2023 (Handbook E.I.01), apéndice A.1</a:t>
+            </a:r>
+          </a:p>
+        </p:txBody>
+      </p:sp>
+    </p:spTree>
+  </p:cSld>
+  <p:clrMapOvr>
+    <a:masterClrMapping/>
+  </p:clrMapOvr>
+</p:sld>
+</file>
+
+<file path=ppt/slides/slide13.xml><?xml version="1.0" encoding="utf-8"?>
+<p:sld xmlns:a="http://schemas.openxmlformats.org/drawingml/2006/main" xmlns:p="http://schemas.openxmlformats.org/presentationml/2006/main" xmlns:r="http://schemas.openxmlformats.org/officeDocument/2006/relationships">
+  <p:cSld>
+    <p:spTree>
+      <p:nvGrpSpPr>
+        <p:cNvPr id="1" name=""/>
+        <p:cNvGrpSpPr/>
+        <p:nvPr/>
+      </p:nvGrpSpPr>
+      <p:grpSpPr/>
+      <p:sp>
+        <p:nvSpPr>
+          <p:cNvPr id="2" name="Oval 1"/>
+          <p:cNvSpPr/>
+          <p:nvPr/>
+        </p:nvSpPr>
+        <p:spPr>
+          <a:xfrm>
+            <a:off x="548640" y="502920"/>
+            <a:ext cx="502920" cy="502920"/>
+          </a:xfrm>
+          <a:prstGeom prst="ellipse">
+            <a:avLst/>
+          </a:prstGeom>
+          <a:solidFill>
+            <a:srgbClr val="DE911D"/>
+          </a:solidFill>
+          <a:ln>
+            <a:noFill/>
+          </a:ln>
+          <a:effectLst/>
+        </p:spPr>
+        <p:style>
+          <a:lnRef idx="1">
+            <a:schemeClr val="accent1"/>
+          </a:lnRef>
+          <a:fillRef idx="3">
+            <a:schemeClr val="accent1"/>
+          </a:fillRef>
+          <a:effectRef idx="2">
+            <a:schemeClr val="accent1"/>
+          </a:effectRef>
+          <a:fontRef idx="minor">
+            <a:schemeClr val="lt1"/>
+          </a:fontRef>
+        </p:style>
+        <p:txBody>
+          <a:bodyPr rtlCol="0" anchor="ctr"/>
+          <a:lstStyle/>
+          <a:p>
+            <a:pPr algn="ctr"/>
+          </a:p>
+        </p:txBody>
+      </p:sp>
+      <p:sp>
+        <p:nvSpPr>
+          <p:cNvPr id="3" name="TextBox 2"/>
+          <p:cNvSpPr txBox="1"/>
+          <p:nvPr/>
+        </p:nvSpPr>
+        <p:spPr>
+          <a:xfrm>
+            <a:off x="548640" y="502920"/>
+            <a:ext cx="502920" cy="502920"/>
+          </a:xfrm>
+          <a:prstGeom prst="rect">
+            <a:avLst/>
+          </a:prstGeom>
+          <a:noFill/>
+        </p:spPr>
+        <p:txBody>
+          <a:bodyPr wrap="square">
+            <a:spAutoFit/>
+          </a:bodyPr>
+          <a:lstStyle/>
+          <a:p>
+            <a:pPr algn="ctr"/>
+            <a:r>
+              <a:rPr sz="2000" b="0">
+                <a:solidFill>
+                  <a:srgbClr val="0A1F33"/>
+                </a:solidFill>
+                <a:latin typeface="Calibri"/>
+              </a:rPr>
+              <a:t>?</a:t>
+            </a:r>
+          </a:p>
+        </p:txBody>
+      </p:sp>
+      <p:sp>
+        <p:nvSpPr>
+          <p:cNvPr id="4" name="TextBox 3"/>
+          <p:cNvSpPr txBox="1"/>
+          <p:nvPr/>
+        </p:nvSpPr>
+        <p:spPr>
+          <a:xfrm>
+            <a:off x="1234440" y="530352"/>
+            <a:ext cx="9144000" cy="457200"/>
+          </a:xfrm>
+          <a:prstGeom prst="rect">
+            <a:avLst/>
+          </a:prstGeom>
+          <a:noFill/>
+        </p:spPr>
+        <p:txBody>
+          <a:bodyPr wrap="square">
+            <a:spAutoFit/>
+          </a:bodyPr>
+          <a:lstStyle/>
+          <a:p>
+            <a:r>
+              <a:rPr sz="1400" b="1">
+                <a:solidFill>
+                  <a:srgbClr val="DE911D"/>
+                </a:solidFill>
+                <a:latin typeface="Calibri"/>
+              </a:rPr>
+              <a:t>CASO 3 · ¿QUÉ DECIDE LA PERSONA ÁRBITRA?</a:t>
+            </a:r>
+          </a:p>
+        </p:txBody>
+      </p:sp>
+      <p:sp>
+        <p:nvSpPr>
+          <p:cNvPr id="5" name="TextBox 4"/>
+          <p:cNvSpPr txBox="1"/>
+          <p:nvPr/>
+        </p:nvSpPr>
+        <p:spPr>
+          <a:xfrm>
+            <a:off x="548640" y="1051560"/>
+            <a:ext cx="11064240" cy="822960"/>
+          </a:xfrm>
+          <a:prstGeom prst="rect">
+            <a:avLst/>
+          </a:prstGeom>
+          <a:noFill/>
+        </p:spPr>
+        <p:txBody>
+          <a:bodyPr wrap="square">
+            <a:spAutoFit/>
+          </a:bodyPr>
+          <a:lstStyle/>
+          <a:p>
+            <a:r>
+              <a:rPr sz="2600" b="1">
+                <a:solidFill>
+                  <a:srgbClr val="0A1F33"/>
+                </a:solidFill>
+                <a:latin typeface="Cambria"/>
+              </a:rPr>
+              <a:t>Mate y bandera</a:t>
+            </a:r>
+          </a:p>
+        </p:txBody>
+      </p:sp>
+      <p:sp>
+        <p:nvSpPr>
+          <p:cNvPr id="6" name="Rectangle 5"/>
+          <p:cNvSpPr/>
+          <p:nvPr/>
+        </p:nvSpPr>
+        <p:spPr>
+          <a:xfrm>
+            <a:off x="548640" y="1965960"/>
+            <a:ext cx="11064240" cy="4206240"/>
+          </a:xfrm>
+          <a:prstGeom prst="rect">
+            <a:avLst/>
+          </a:prstGeom>
+          <a:solidFill>
+            <a:srgbClr val="F0F4F8"/>
+          </a:solidFill>
+          <a:ln>
+            <a:noFill/>
+          </a:ln>
+          <a:effectLst/>
+        </p:spPr>
+        <p:style>
+          <a:lnRef idx="1">
+            <a:schemeClr val="accent1"/>
+          </a:lnRef>
+          <a:fillRef idx="3">
+            <a:schemeClr val="accent1"/>
+          </a:fillRef>
+          <a:effectRef idx="2">
+            <a:schemeClr val="accent1"/>
+          </a:effectRef>
+          <a:fontRef idx="minor">
+            <a:schemeClr val="lt1"/>
+          </a:fontRef>
+        </p:style>
+        <p:txBody>
+          <a:bodyPr rtlCol="0" anchor="ctr"/>
+          <a:lstStyle/>
+          <a:p>
+            <a:pPr algn="ctr"/>
+          </a:p>
+        </p:txBody>
+      </p:sp>
+      <p:sp>
+        <p:nvSpPr>
+          <p:cNvPr id="7" name="TextBox 6"/>
+          <p:cNvSpPr txBox="1"/>
+          <p:nvPr/>
+        </p:nvSpPr>
+        <p:spPr>
+          <a:xfrm>
+            <a:off x="914400" y="2240280"/>
+            <a:ext cx="10332720" cy="3749039"/>
+          </a:xfrm>
+          <a:prstGeom prst="rect">
+            <a:avLst/>
+          </a:prstGeom>
+          <a:noFill/>
+        </p:spPr>
+        <p:txBody>
+          <a:bodyPr wrap="square">
+            <a:spAutoFit/>
+          </a:bodyPr>
+          <a:lstStyle/>
+          <a:p>
+            <a:r>
+              <a:rPr sz="2000" b="0">
+                <a:solidFill>
+                  <a:srgbClr val="334E68"/>
+                </a:solidFill>
+                <a:latin typeface="Calibri"/>
+              </a:rPr>
+              <a:t>En relámpago, un estudiante da mate y, un instante después, cae su bandera.</a:t>
+            </a:r>
+          </a:p>
+        </p:txBody>
+      </p:sp>
+    </p:spTree>
+  </p:cSld>
+  <p:clrMapOvr>
+    <a:masterClrMapping/>
+  </p:clrMapOvr>
+</p:sld>
+</file>
+
+<file path=ppt/slides/slide14.xml><?xml version="1.0" encoding="utf-8"?>
+<p:sld xmlns:a="http://schemas.openxmlformats.org/drawingml/2006/main" xmlns:p="http://schemas.openxmlformats.org/presentationml/2006/main" xmlns:r="http://schemas.openxmlformats.org/officeDocument/2006/relationships">
+  <p:cSld>
+    <p:spTree>
+      <p:nvGrpSpPr>
+        <p:cNvPr id="1" name=""/>
+        <p:cNvGrpSpPr/>
+        <p:nvPr/>
+      </p:nvGrpSpPr>
+      <p:grpSpPr/>
+      <p:sp>
+        <p:nvSpPr>
+          <p:cNvPr id="2" name="Rectangle 1"/>
+          <p:cNvSpPr/>
+          <p:nvPr/>
+        </p:nvSpPr>
+        <p:spPr>
+          <a:xfrm>
+            <a:off x="0" y="0"/>
+            <a:ext cx="12191695" cy="6858000"/>
+          </a:xfrm>
+          <a:prstGeom prst="rect">
+            <a:avLst/>
+          </a:prstGeom>
+          <a:solidFill>
+            <a:srgbClr val="102A43"/>
+          </a:solidFill>
+          <a:ln>
+            <a:noFill/>
+          </a:ln>
+          <a:effectLst/>
+        </p:spPr>
+        <p:style>
+          <a:lnRef idx="1">
+            <a:schemeClr val="accent1"/>
+          </a:lnRef>
+          <a:fillRef idx="3">
+            <a:schemeClr val="accent1"/>
+          </a:fillRef>
+          <a:effectRef idx="2">
+            <a:schemeClr val="accent1"/>
+          </a:effectRef>
+          <a:fontRef idx="minor">
+            <a:schemeClr val="lt1"/>
+          </a:fontRef>
+        </p:style>
+        <p:txBody>
+          <a:bodyPr rtlCol="0" anchor="ctr"/>
+          <a:lstStyle/>
+          <a:p>
+            <a:pPr algn="ctr"/>
+          </a:p>
+        </p:txBody>
+      </p:sp>
+      <p:sp>
+        <p:nvSpPr>
+          <p:cNvPr id="3" name="TextBox 2"/>
+          <p:cNvSpPr txBox="1"/>
+          <p:nvPr/>
+        </p:nvSpPr>
+        <p:spPr>
+          <a:xfrm>
+            <a:off x="548640" y="548640"/>
+            <a:ext cx="11064240" cy="457200"/>
+          </a:xfrm>
+          <a:prstGeom prst="rect">
+            <a:avLst/>
+          </a:prstGeom>
+          <a:noFill/>
+        </p:spPr>
+        <p:txBody>
+          <a:bodyPr wrap="square">
+            <a:spAutoFit/>
+          </a:bodyPr>
+          <a:lstStyle/>
+          <a:p>
+            <a:r>
+              <a:rPr sz="1400" b="1">
+                <a:solidFill>
+                  <a:srgbClr val="F0B429"/>
+                </a:solidFill>
+                <a:latin typeface="Calibri"/>
+              </a:rPr>
+              <a:t>CASO 3 · DECISIÓN</a:t>
+            </a:r>
+          </a:p>
+        </p:txBody>
+      </p:sp>
+      <p:sp>
+        <p:nvSpPr>
+          <p:cNvPr id="4" name="TextBox 3"/>
+          <p:cNvSpPr txBox="1"/>
+          <p:nvPr/>
+        </p:nvSpPr>
+        <p:spPr>
+          <a:xfrm>
+            <a:off x="548640" y="1051560"/>
+            <a:ext cx="11064240" cy="822960"/>
+          </a:xfrm>
+          <a:prstGeom prst="rect">
+            <a:avLst/>
+          </a:prstGeom>
+          <a:noFill/>
+        </p:spPr>
+        <p:txBody>
+          <a:bodyPr wrap="square">
+            <a:spAutoFit/>
+          </a:bodyPr>
+          <a:lstStyle/>
+          <a:p>
+            <a:r>
+              <a:rPr sz="2600" b="1">
+                <a:solidFill>
+                  <a:srgbClr val="FFFFFF"/>
+                </a:solidFill>
+                <a:latin typeface="Cambria"/>
+              </a:rPr>
+              <a:t>Mate y bandera</a:t>
+            </a:r>
+          </a:p>
+        </p:txBody>
+      </p:sp>
+      <p:sp>
+        <p:nvSpPr>
+          <p:cNvPr id="5" name="TextBox 4"/>
+          <p:cNvSpPr txBox="1"/>
+          <p:nvPr/>
+        </p:nvSpPr>
+        <p:spPr>
+          <a:xfrm>
+            <a:off x="548640" y="2103120"/>
+            <a:ext cx="11064240" cy="3931920"/>
+          </a:xfrm>
+          <a:prstGeom prst="rect">
+            <a:avLst/>
+          </a:prstGeom>
+          <a:noFill/>
+        </p:spPr>
+        <p:txBody>
+          <a:bodyPr wrap="square">
+            <a:spAutoFit/>
+          </a:bodyPr>
+          <a:lstStyle/>
+          <a:p>
+            <a:r>
+              <a:rPr sz="2000" b="0">
+                <a:solidFill>
+                  <a:srgbClr val="CADCFC"/>
+                </a:solidFill>
+                <a:latin typeface="Calibri"/>
+              </a:rPr>
+              <a:t>Gana quien dio mate: el mate termina la partida en el momento en que se produce.</a:t>
+            </a:r>
+          </a:p>
+        </p:txBody>
+      </p:sp>
+      <p:sp>
+        <p:nvSpPr>
+          <p:cNvPr id="6" name="TextBox 5"/>
+          <p:cNvSpPr txBox="1"/>
+          <p:nvPr/>
+        </p:nvSpPr>
+        <p:spPr>
+          <a:xfrm>
+            <a:off x="548640" y="6263640"/>
+            <a:ext cx="11064240" cy="365760"/>
+          </a:xfrm>
+          <a:prstGeom prst="rect">
+            <a:avLst/>
+          </a:prstGeom>
+          <a:noFill/>
+        </p:spPr>
+        <p:txBody>
+          <a:bodyPr wrap="square">
+            <a:spAutoFit/>
+          </a:bodyPr>
+          <a:lstStyle/>
+          <a:p>
+            <a:r>
+              <a:rPr sz="1100" b="0">
+                <a:solidFill>
+                  <a:srgbClr val="9FB3C8"/>
+                </a:solidFill>
+                <a:latin typeface="Calibri"/>
+              </a:rPr>
+              <a:t>Fuente: Leyes del Ajedrez 2023 (Handbook E.I.01), art. 5.1.1 y apéndice B.3</a:t>
+            </a:r>
+          </a:p>
+        </p:txBody>
+      </p:sp>
+    </p:spTree>
+  </p:cSld>
+  <p:clrMapOvr>
+    <a:masterClrMapping/>
+  </p:clrMapOvr>
+</p:sld>
+</file>
+
+<file path=ppt/slides/slide15.xml><?xml version="1.0" encoding="utf-8"?>
+<p:sld xmlns:a="http://schemas.openxmlformats.org/drawingml/2006/main" xmlns:p="http://schemas.openxmlformats.org/presentationml/2006/main" xmlns:r="http://schemas.openxmlformats.org/officeDocument/2006/relationships">
+  <p:cSld>
+    <p:spTree>
+      <p:nvGrpSpPr>
+        <p:cNvPr id="1" name=""/>
+        <p:cNvGrpSpPr/>
+        <p:nvPr/>
+      </p:nvGrpSpPr>
+      <p:grpSpPr/>
+      <p:sp>
+        <p:nvSpPr>
+          <p:cNvPr id="2" name="Rectangle 1"/>
+          <p:cNvSpPr/>
+          <p:nvPr/>
+        </p:nvSpPr>
+        <p:spPr>
+          <a:xfrm>
+            <a:off x="0" y="0"/>
+            <a:ext cx="12191695" cy="6858000"/>
+          </a:xfrm>
+          <a:prstGeom prst="rect">
+            <a:avLst/>
+          </a:prstGeom>
+          <a:solidFill>
+            <a:srgbClr val="102A43"/>
+          </a:solidFill>
+          <a:ln>
+            <a:noFill/>
+          </a:ln>
+          <a:effectLst/>
+        </p:spPr>
+        <p:style>
+          <a:lnRef idx="1">
+            <a:schemeClr val="accent1"/>
+          </a:lnRef>
+          <a:fillRef idx="3">
+            <a:schemeClr val="accent1"/>
+          </a:fillRef>
+          <a:effectRef idx="2">
+            <a:schemeClr val="accent1"/>
+          </a:effectRef>
+          <a:fontRef idx="minor">
+            <a:schemeClr val="lt1"/>
+          </a:fontRef>
+        </p:style>
+        <p:txBody>
+          <a:bodyPr rtlCol="0" anchor="ctr"/>
+          <a:lstStyle/>
+          <a:p>
+            <a:pPr algn="ctr"/>
+          </a:p>
+        </p:txBody>
+      </p:sp>
+      <p:sp>
+        <p:nvSpPr>
+          <p:cNvPr id="3" name="Oval 2"/>
+          <p:cNvSpPr/>
+          <p:nvPr/>
+        </p:nvSpPr>
+        <p:spPr>
+          <a:xfrm>
+            <a:off x="-1280160" y="-1463040"/>
+            <a:ext cx="4114800" cy="4114800"/>
+          </a:xfrm>
+          <a:prstGeom prst="ellipse">
+            <a:avLst/>
+          </a:prstGeom>
+          <a:solidFill>
+            <a:srgbClr val="0A1F33"/>
+          </a:solidFill>
+          <a:ln>
+            <a:noFill/>
+          </a:ln>
+          <a:effectLst/>
+        </p:spPr>
+        <p:style>
+          <a:lnRef idx="1">
+            <a:schemeClr val="accent1"/>
+          </a:lnRef>
+          <a:fillRef idx="3">
+            <a:schemeClr val="accent1"/>
+          </a:fillRef>
+          <a:effectRef idx="2">
+            <a:schemeClr val="accent1"/>
+          </a:effectRef>
+          <a:fontRef idx="minor">
+            <a:schemeClr val="lt1"/>
+          </a:fontRef>
+        </p:style>
+        <p:txBody>
+          <a:bodyPr rtlCol="0" anchor="ctr"/>
+          <a:lstStyle/>
+          <a:p>
+            <a:pPr algn="ctr"/>
+          </a:p>
+        </p:txBody>
+      </p:sp>
+      <p:sp>
+        <p:nvSpPr>
+          <p:cNvPr id="4" name="Oval 3"/>
+          <p:cNvSpPr/>
+          <p:nvPr/>
+        </p:nvSpPr>
+        <p:spPr>
+          <a:xfrm>
+            <a:off x="5175504" y="822960"/>
+            <a:ext cx="1828800" cy="1828800"/>
+          </a:xfrm>
+          <a:prstGeom prst="ellipse">
+            <a:avLst/>
+          </a:prstGeom>
+          <a:solidFill>
+            <a:srgbClr val="DE911D"/>
+          </a:solidFill>
+          <a:ln>
+            <a:noFill/>
+          </a:ln>
+          <a:effectLst/>
+        </p:spPr>
+        <p:style>
+          <a:lnRef idx="1">
+            <a:schemeClr val="accent1"/>
+          </a:lnRef>
+          <a:fillRef idx="3">
+            <a:schemeClr val="accent1"/>
+          </a:fillRef>
+          <a:effectRef idx="2">
+            <a:schemeClr val="accent1"/>
+          </a:effectRef>
+          <a:fontRef idx="minor">
+            <a:schemeClr val="lt1"/>
+          </a:fontRef>
+        </p:style>
+        <p:txBody>
+          <a:bodyPr rtlCol="0" anchor="ctr"/>
+          <a:lstStyle/>
+          <a:p>
+            <a:pPr algn="ctr"/>
+          </a:p>
+        </p:txBody>
+      </p:sp>
+      <p:sp>
+        <p:nvSpPr>
+          <p:cNvPr id="5" name="TextBox 4"/>
+          <p:cNvSpPr txBox="1"/>
+          <p:nvPr/>
+        </p:nvSpPr>
+        <p:spPr>
+          <a:xfrm>
+            <a:off x="5175504" y="822960"/>
+            <a:ext cx="1828800" cy="1828800"/>
+          </a:xfrm>
+          <a:prstGeom prst="rect">
+            <a:avLst/>
+          </a:prstGeom>
+          <a:noFill/>
+        </p:spPr>
+        <p:txBody>
+          <a:bodyPr wrap="square">
+            <a:spAutoFit/>
+          </a:bodyPr>
+          <a:lstStyle/>
+          <a:p>
+            <a:pPr algn="ctr"/>
+            <a:r>
+              <a:rPr sz="4400" b="1">
+                <a:solidFill>
+                  <a:srgbClr val="0A1F33"/>
+                </a:solidFill>
+                <a:latin typeface="Calibri"/>
+              </a:rPr>
+              <a:t>✔</a:t>
+            </a:r>
+          </a:p>
+        </p:txBody>
+      </p:sp>
+      <p:sp>
+        <p:nvSpPr>
+          <p:cNvPr id="6" name="TextBox 5"/>
+          <p:cNvSpPr txBox="1"/>
+          <p:nvPr/>
+        </p:nvSpPr>
+        <p:spPr>
+          <a:xfrm>
+            <a:off x="548640" y="2880360"/>
+            <a:ext cx="11064240" cy="457200"/>
+          </a:xfrm>
+          <a:prstGeom prst="rect">
+            <a:avLst/>
+          </a:prstGeom>
+          <a:noFill/>
+        </p:spPr>
+        <p:txBody>
+          <a:bodyPr wrap="square">
+            <a:spAutoFit/>
+          </a:bodyPr>
+          <a:lstStyle/>
+          <a:p>
+            <a:pPr algn="ctr"/>
+            <a:r>
+              <a:rPr sz="1400" b="1">
+                <a:solidFill>
+                  <a:srgbClr val="F0B429"/>
+                </a:solidFill>
+                <a:latin typeface="Calibri"/>
+              </a:rPr>
+              <a:t>PRÁCTICA — CÁLCULO DE DESEMPATES DE UN TORNEO SIMULADO</a:t>
+            </a:r>
+          </a:p>
+        </p:txBody>
+      </p:sp>
+      <p:sp>
+        <p:nvSpPr>
+          <p:cNvPr id="7" name="TextBox 6"/>
+          <p:cNvSpPr txBox="1"/>
+          <p:nvPr/>
+        </p:nvSpPr>
+        <p:spPr>
+          <a:xfrm>
+            <a:off x="1280160" y="3383280"/>
+            <a:ext cx="9601200" cy="2377440"/>
+          </a:xfrm>
+          <a:prstGeom prst="rect">
+            <a:avLst/>
+          </a:prstGeom>
+          <a:noFill/>
+        </p:spPr>
+        <p:txBody>
+          <a:bodyPr wrap="square">
+            <a:spAutoFit/>
+          </a:bodyPr>
+          <a:lstStyle/>
+          <a:p>
+            <a:pPr algn="ctr"/>
+            <a:r>
+              <a:rPr sz="2000" b="0">
+                <a:solidFill>
+                  <a:srgbClr val="FFFFFF"/>
+                </a:solidFill>
+                <a:latin typeface="Cambria"/>
+              </a:rPr>
+              <a:t>Con los resultados de un torneo simulado de 8 jugadores, cada participante calcula la tabla final aplicando Buchholz y Sonneborn-Berger.</a:t>
+            </a:r>
+          </a:p>
+        </p:txBody>
+      </p:sp>
+      <p:sp>
+        <p:nvSpPr>
+          <p:cNvPr id="8" name="TextBox 7"/>
+          <p:cNvSpPr txBox="1"/>
+          <p:nvPr/>
+        </p:nvSpPr>
+        <p:spPr>
+          <a:xfrm>
+            <a:off x="548640" y="6263640"/>
+            <a:ext cx="11064240" cy="365760"/>
+          </a:xfrm>
+          <a:prstGeom prst="rect">
+            <a:avLst/>
+          </a:prstGeom>
+          <a:noFill/>
+        </p:spPr>
+        <p:txBody>
+          <a:bodyPr wrap="square">
+            <a:spAutoFit/>
+          </a:bodyPr>
+          <a:lstStyle/>
+          <a:p>
+            <a:pPr algn="ctr"/>
+            <a:r>
+              <a:rPr sz="1200" b="0">
+                <a:solidFill>
+                  <a:srgbClr val="9FB3C8"/>
+                </a:solidFill>
+                <a:latin typeface="Calibri"/>
+              </a:rPr>
+              <a:t>Formación Ajedrez · Sesión 3</a:t>
+            </a:r>
+          </a:p>
+        </p:txBody>
+      </p:sp>
+    </p:spTree>
+  </p:cSld>
+  <p:clrMapOvr>
+    <a:masterClrMapping/>
+  </p:clrMapOvr>
+</p:sld>
+</file>
+
+<file path=ppt/slides/slide16.xml><?xml version="1.0" encoding="utf-8"?>
+<p:sld xmlns:a="http://schemas.openxmlformats.org/drawingml/2006/main" xmlns:p="http://schemas.openxmlformats.org/presentationml/2006/main" xmlns:r="http://schemas.openxmlformats.org/officeDocument/2006/relationships">
+  <p:cSld>
+    <p:spTree>
+      <p:nvGrpSpPr>
+        <p:cNvPr id="1" name=""/>
+        <p:cNvGrpSpPr/>
+        <p:nvPr/>
+      </p:nvGrpSpPr>
+      <p:grpSpPr/>
+      <p:sp>
+        <p:nvSpPr>
+          <p:cNvPr id="2" name="Oval 1"/>
+          <p:cNvSpPr/>
+          <p:nvPr/>
+        </p:nvSpPr>
+        <p:spPr>
+          <a:xfrm>
+            <a:off x="548640" y="502920"/>
+            <a:ext cx="502920" cy="502920"/>
+          </a:xfrm>
+          <a:prstGeom prst="ellipse">
+            <a:avLst/>
+          </a:prstGeom>
+          <a:solidFill>
+            <a:srgbClr val="DE911D"/>
+          </a:solidFill>
+          <a:ln>
+            <a:noFill/>
+          </a:ln>
+          <a:effectLst/>
+        </p:spPr>
+        <p:style>
+          <a:lnRef idx="1">
+            <a:schemeClr val="accent1"/>
+          </a:lnRef>
+          <a:fillRef idx="3">
+            <a:schemeClr val="accent1"/>
+          </a:fillRef>
+          <a:effectRef idx="2">
+            <a:schemeClr val="accent1"/>
+          </a:effectRef>
+          <a:fontRef idx="minor">
+            <a:schemeClr val="lt1"/>
+          </a:fontRef>
+        </p:style>
+        <p:txBody>
+          <a:bodyPr rtlCol="0" anchor="ctr"/>
+          <a:lstStyle/>
+          <a:p>
+            <a:pPr algn="ctr"/>
+          </a:p>
+        </p:txBody>
+      </p:sp>
+      <p:sp>
+        <p:nvSpPr>
+          <p:cNvPr id="3" name="TextBox 2"/>
+          <p:cNvSpPr txBox="1"/>
+          <p:nvPr/>
+        </p:nvSpPr>
+        <p:spPr>
+          <a:xfrm>
+            <a:off x="548640" y="502920"/>
+            <a:ext cx="502920" cy="502920"/>
+          </a:xfrm>
+          <a:prstGeom prst="rect">
+            <a:avLst/>
+          </a:prstGeom>
+          <a:noFill/>
+        </p:spPr>
+        <p:txBody>
+          <a:bodyPr wrap="square">
+            <a:spAutoFit/>
+          </a:bodyPr>
+          <a:lstStyle/>
+          <a:p>
+            <a:pPr algn="ctr"/>
+            <a:r>
+              <a:rPr sz="2000" b="0">
+                <a:solidFill>
+                  <a:srgbClr val="0A1F33"/>
+                </a:solidFill>
+                <a:latin typeface="Calibri"/>
+              </a:rPr>
+              <a:t>✎</a:t>
+            </a:r>
+          </a:p>
+        </p:txBody>
+      </p:sp>
+      <p:sp>
+        <p:nvSpPr>
+          <p:cNvPr id="4" name="TextBox 3"/>
+          <p:cNvSpPr txBox="1"/>
+          <p:nvPr/>
+        </p:nvSpPr>
+        <p:spPr>
+          <a:xfrm>
+            <a:off x="1234440" y="530352"/>
+            <a:ext cx="9144000" cy="457200"/>
+          </a:xfrm>
+          <a:prstGeom prst="rect">
+            <a:avLst/>
+          </a:prstGeom>
+          <a:noFill/>
+        </p:spPr>
+        <p:txBody>
+          <a:bodyPr wrap="square">
+            <a:spAutoFit/>
+          </a:bodyPr>
+          <a:lstStyle/>
+          <a:p>
+            <a:r>
+              <a:rPr sz="1400" b="1">
+                <a:solidFill>
+                  <a:srgbClr val="DE911D"/>
+                </a:solidFill>
+                <a:latin typeface="Calibri"/>
+              </a:rPr>
+              <a:t>EJERCICIO 1 DE 4</a:t>
+            </a:r>
+          </a:p>
+        </p:txBody>
+      </p:sp>
+      <p:sp>
+        <p:nvSpPr>
+          <p:cNvPr id="5" name="Rectangle 4"/>
+          <p:cNvSpPr/>
+          <p:nvPr/>
+        </p:nvSpPr>
+        <p:spPr>
+          <a:xfrm>
+            <a:off x="548640" y="1188720"/>
+            <a:ext cx="11064240" cy="5029200"/>
+          </a:xfrm>
+          <a:prstGeom prst="rect">
+            <a:avLst/>
+          </a:prstGeom>
+          <a:solidFill>
+            <a:srgbClr val="F0F4F8"/>
+          </a:solidFill>
+          <a:ln>
+            <a:noFill/>
+          </a:ln>
+          <a:effectLst/>
+        </p:spPr>
+        <p:style>
+          <a:lnRef idx="1">
+            <a:schemeClr val="accent1"/>
+          </a:lnRef>
+          <a:fillRef idx="3">
+            <a:schemeClr val="accent1"/>
+          </a:fillRef>
+          <a:effectRef idx="2">
+            <a:schemeClr val="accent1"/>
+          </a:effectRef>
+          <a:fontRef idx="minor">
+            <a:schemeClr val="lt1"/>
+          </a:fontRef>
+        </p:style>
+        <p:txBody>
+          <a:bodyPr rtlCol="0" anchor="ctr"/>
+          <a:lstStyle/>
+          <a:p>
+            <a:pPr algn="ctr"/>
+          </a:p>
+        </p:txBody>
+      </p:sp>
+      <p:sp>
+        <p:nvSpPr>
+          <p:cNvPr id="6" name="TextBox 5"/>
+          <p:cNvSpPr txBox="1"/>
+          <p:nvPr/>
+        </p:nvSpPr>
+        <p:spPr>
+          <a:xfrm>
+            <a:off x="914400" y="1554480"/>
+            <a:ext cx="10332720" cy="4480560"/>
+          </a:xfrm>
+          <a:prstGeom prst="rect">
+            <a:avLst/>
+          </a:prstGeom>
+          <a:noFill/>
+        </p:spPr>
+        <p:txBody>
+          <a:bodyPr wrap="square">
+            <a:spAutoFit/>
+          </a:bodyPr>
+          <a:lstStyle/>
+          <a:p>
+            <a:r>
+              <a:rPr sz="2200" b="0">
+                <a:solidFill>
+                  <a:srgbClr val="0A1F33"/>
+                </a:solidFill>
+                <a:latin typeface="Calibri"/>
+              </a:rPr>
+              <a:t>Clasifica estos ritmos: a) 10 min sin incremento; b) 10 min + 5 s; c) 25 min + 10 s; d) 60 min sin incremento.</a:t>
+            </a:r>
+          </a:p>
+        </p:txBody>
+      </p:sp>
+    </p:spTree>
+  </p:cSld>
+  <p:clrMapOvr>
+    <a:masterClrMapping/>
+  </p:clrMapOvr>
+</p:sld>
+</file>
+
+<file path=ppt/slides/slide17.xml><?xml version="1.0" encoding="utf-8"?>
+<p:sld xmlns:a="http://schemas.openxmlformats.org/drawingml/2006/main" xmlns:p="http://schemas.openxmlformats.org/presentationml/2006/main" xmlns:r="http://schemas.openxmlformats.org/officeDocument/2006/relationships">
+  <p:cSld>
+    <p:spTree>
+      <p:nvGrpSpPr>
+        <p:cNvPr id="1" name=""/>
+        <p:cNvGrpSpPr/>
+        <p:nvPr/>
+      </p:nvGrpSpPr>
+      <p:grpSpPr/>
+      <p:sp>
+        <p:nvSpPr>
+          <p:cNvPr id="2" name="Oval 1"/>
+          <p:cNvSpPr/>
+          <p:nvPr/>
+        </p:nvSpPr>
+        <p:spPr>
+          <a:xfrm>
+            <a:off x="548640" y="502920"/>
+            <a:ext cx="502920" cy="502920"/>
+          </a:xfrm>
+          <a:prstGeom prst="ellipse">
+            <a:avLst/>
+          </a:prstGeom>
+          <a:solidFill>
+            <a:srgbClr val="DE911D"/>
+          </a:solidFill>
+          <a:ln>
+            <a:noFill/>
+          </a:ln>
+          <a:effectLst/>
+        </p:spPr>
+        <p:style>
+          <a:lnRef idx="1">
+            <a:schemeClr val="accent1"/>
+          </a:lnRef>
+          <a:fillRef idx="3">
+            <a:schemeClr val="accent1"/>
+          </a:fillRef>
+          <a:effectRef idx="2">
+            <a:schemeClr val="accent1"/>
+          </a:effectRef>
+          <a:fontRef idx="minor">
+            <a:schemeClr val="lt1"/>
+          </a:fontRef>
+        </p:style>
+        <p:txBody>
+          <a:bodyPr rtlCol="0" anchor="ctr"/>
+          <a:lstStyle/>
+          <a:p>
+            <a:pPr algn="ctr"/>
+          </a:p>
+        </p:txBody>
+      </p:sp>
+      <p:sp>
+        <p:nvSpPr>
+          <p:cNvPr id="3" name="TextBox 2"/>
+          <p:cNvSpPr txBox="1"/>
+          <p:nvPr/>
+        </p:nvSpPr>
+        <p:spPr>
+          <a:xfrm>
+            <a:off x="548640" y="502920"/>
+            <a:ext cx="502920" cy="502920"/>
+          </a:xfrm>
+          <a:prstGeom prst="rect">
+            <a:avLst/>
+          </a:prstGeom>
+          <a:noFill/>
+        </p:spPr>
+        <p:txBody>
+          <a:bodyPr wrap="square">
+            <a:spAutoFit/>
+          </a:bodyPr>
+          <a:lstStyle/>
+          <a:p>
+            <a:pPr algn="ctr"/>
+            <a:r>
+              <a:rPr sz="2000" b="0">
+                <a:solidFill>
+                  <a:srgbClr val="0A1F33"/>
+                </a:solidFill>
+                <a:latin typeface="Calibri"/>
+              </a:rPr>
+              <a:t>✎</a:t>
+            </a:r>
+          </a:p>
+        </p:txBody>
+      </p:sp>
+      <p:sp>
+        <p:nvSpPr>
+          <p:cNvPr id="4" name="TextBox 3"/>
+          <p:cNvSpPr txBox="1"/>
+          <p:nvPr/>
+        </p:nvSpPr>
+        <p:spPr>
+          <a:xfrm>
+            <a:off x="1234440" y="530352"/>
+            <a:ext cx="9144000" cy="457200"/>
+          </a:xfrm>
+          <a:prstGeom prst="rect">
+            <a:avLst/>
+          </a:prstGeom>
+          <a:noFill/>
+        </p:spPr>
+        <p:txBody>
+          <a:bodyPr wrap="square">
+            <a:spAutoFit/>
+          </a:bodyPr>
+          <a:lstStyle/>
+          <a:p>
+            <a:r>
+              <a:rPr sz="1400" b="1">
+                <a:solidFill>
+                  <a:srgbClr val="DE911D"/>
+                </a:solidFill>
+                <a:latin typeface="Calibri"/>
+              </a:rPr>
+              <a:t>EJERCICIO 2 DE 4</a:t>
+            </a:r>
+          </a:p>
+        </p:txBody>
+      </p:sp>
+      <p:sp>
+        <p:nvSpPr>
+          <p:cNvPr id="5" name="Rectangle 4"/>
+          <p:cNvSpPr/>
+          <p:nvPr/>
+        </p:nvSpPr>
+        <p:spPr>
+          <a:xfrm>
+            <a:off x="548640" y="1188720"/>
+            <a:ext cx="11064240" cy="5029200"/>
+          </a:xfrm>
+          <a:prstGeom prst="rect">
+            <a:avLst/>
+          </a:prstGeom>
+          <a:solidFill>
+            <a:srgbClr val="F0F4F8"/>
+          </a:solidFill>
+          <a:ln>
+            <a:noFill/>
+          </a:ln>
+          <a:effectLst/>
+        </p:spPr>
+        <p:style>
+          <a:lnRef idx="1">
+            <a:schemeClr val="accent1"/>
+          </a:lnRef>
+          <a:fillRef idx="3">
+            <a:schemeClr val="accent1"/>
+          </a:fillRef>
+          <a:effectRef idx="2">
+            <a:schemeClr val="accent1"/>
+          </a:effectRef>
+          <a:fontRef idx="minor">
+            <a:schemeClr val="lt1"/>
+          </a:fontRef>
+        </p:style>
+        <p:txBody>
+          <a:bodyPr rtlCol="0" anchor="ctr"/>
+          <a:lstStyle/>
+          <a:p>
+            <a:pPr algn="ctr"/>
+          </a:p>
+        </p:txBody>
+      </p:sp>
+      <p:sp>
+        <p:nvSpPr>
+          <p:cNvPr id="6" name="TextBox 5"/>
+          <p:cNvSpPr txBox="1"/>
+          <p:nvPr/>
+        </p:nvSpPr>
+        <p:spPr>
+          <a:xfrm>
+            <a:off x="914400" y="1554480"/>
+            <a:ext cx="10332720" cy="4480560"/>
+          </a:xfrm>
+          <a:prstGeom prst="rect">
+            <a:avLst/>
+          </a:prstGeom>
+          <a:noFill/>
+        </p:spPr>
+        <p:txBody>
+          <a:bodyPr wrap="square">
+            <a:spAutoFit/>
+          </a:bodyPr>
+          <a:lstStyle/>
+          <a:p>
+            <a:r>
+              <a:rPr sz="2200" b="0">
+                <a:solidFill>
+                  <a:srgbClr val="0A1F33"/>
+                </a:solidFill>
+                <a:latin typeface="Calibri"/>
+              </a:rPr>
+              <a:t>Torneo de todos contra todos con 6 jugadores (A a F). A: ½ con B, ganó a C, D y F, perdió con E. B: ½ con A, perdió con C, ganó a D, E y F. C: 3 puntos. D: 2½. E: 1½. F: 1. A y B terminan con 3½. ¿Quién queda primero por Sonneborn-Berger?</a:t>
+            </a:r>
+          </a:p>
+        </p:txBody>
+      </p:sp>
+    </p:spTree>
+  </p:cSld>
+  <p:clrMapOvr>
+    <a:masterClrMapping/>
+  </p:clrMapOvr>
+</p:sld>
+</file>
+
+<file path=ppt/slides/slide18.xml><?xml version="1.0" encoding="utf-8"?>
+<p:sld xmlns:a="http://schemas.openxmlformats.org/drawingml/2006/main" xmlns:p="http://schemas.openxmlformats.org/presentationml/2006/main" xmlns:r="http://schemas.openxmlformats.org/officeDocument/2006/relationships">
+  <p:cSld>
+    <p:spTree>
+      <p:nvGrpSpPr>
+        <p:cNvPr id="1" name=""/>
+        <p:cNvGrpSpPr/>
+        <p:nvPr/>
+      </p:nvGrpSpPr>
+      <p:grpSpPr/>
+      <p:sp>
+        <p:nvSpPr>
+          <p:cNvPr id="2" name="Oval 1"/>
+          <p:cNvSpPr/>
+          <p:nvPr/>
+        </p:nvSpPr>
+        <p:spPr>
+          <a:xfrm>
+            <a:off x="548640" y="502920"/>
+            <a:ext cx="502920" cy="502920"/>
+          </a:xfrm>
+          <a:prstGeom prst="ellipse">
+            <a:avLst/>
+          </a:prstGeom>
+          <a:solidFill>
+            <a:srgbClr val="DE911D"/>
+          </a:solidFill>
+          <a:ln>
+            <a:noFill/>
+          </a:ln>
+          <a:effectLst/>
+        </p:spPr>
+        <p:style>
+          <a:lnRef idx="1">
+            <a:schemeClr val="accent1"/>
+          </a:lnRef>
+          <a:fillRef idx="3">
+            <a:schemeClr val="accent1"/>
+          </a:fillRef>
+          <a:effectRef idx="2">
+            <a:schemeClr val="accent1"/>
+          </a:effectRef>
+          <a:fontRef idx="minor">
+            <a:schemeClr val="lt1"/>
+          </a:fontRef>
+        </p:style>
+        <p:txBody>
+          <a:bodyPr rtlCol="0" anchor="ctr"/>
+          <a:lstStyle/>
+          <a:p>
+            <a:pPr algn="ctr"/>
+          </a:p>
+        </p:txBody>
+      </p:sp>
+      <p:sp>
+        <p:nvSpPr>
+          <p:cNvPr id="3" name="TextBox 2"/>
+          <p:cNvSpPr txBox="1"/>
+          <p:nvPr/>
+        </p:nvSpPr>
+        <p:spPr>
+          <a:xfrm>
+            <a:off x="548640" y="502920"/>
+            <a:ext cx="502920" cy="502920"/>
+          </a:xfrm>
+          <a:prstGeom prst="rect">
+            <a:avLst/>
+          </a:prstGeom>
+          <a:noFill/>
+        </p:spPr>
+        <p:txBody>
+          <a:bodyPr wrap="square">
+            <a:spAutoFit/>
+          </a:bodyPr>
+          <a:lstStyle/>
+          <a:p>
+            <a:pPr algn="ctr"/>
+            <a:r>
+              <a:rPr sz="2000" b="0">
+                <a:solidFill>
+                  <a:srgbClr val="0A1F33"/>
+                </a:solidFill>
+                <a:latin typeface="Calibri"/>
+              </a:rPr>
+              <a:t>✎</a:t>
+            </a:r>
+          </a:p>
+        </p:txBody>
+      </p:sp>
+      <p:sp>
+        <p:nvSpPr>
+          <p:cNvPr id="4" name="TextBox 3"/>
+          <p:cNvSpPr txBox="1"/>
+          <p:nvPr/>
+        </p:nvSpPr>
+        <p:spPr>
+          <a:xfrm>
+            <a:off x="1234440" y="530352"/>
+            <a:ext cx="9144000" cy="457200"/>
+          </a:xfrm>
+          <a:prstGeom prst="rect">
+            <a:avLst/>
+          </a:prstGeom>
+          <a:noFill/>
+        </p:spPr>
+        <p:txBody>
+          <a:bodyPr wrap="square">
+            <a:spAutoFit/>
+          </a:bodyPr>
+          <a:lstStyle/>
+          <a:p>
+            <a:r>
+              <a:rPr sz="1400" b="1">
+                <a:solidFill>
+                  <a:srgbClr val="DE911D"/>
+                </a:solidFill>
+                <a:latin typeface="Calibri"/>
+              </a:rPr>
+              <a:t>EJERCICIO 3 DE 4</a:t>
+            </a:r>
+          </a:p>
+        </p:txBody>
+      </p:sp>
+      <p:sp>
+        <p:nvSpPr>
+          <p:cNvPr id="5" name="Rectangle 4"/>
+          <p:cNvSpPr/>
+          <p:nvPr/>
+        </p:nvSpPr>
+        <p:spPr>
+          <a:xfrm>
+            <a:off x="548640" y="1188720"/>
+            <a:ext cx="11064240" cy="5029200"/>
+          </a:xfrm>
+          <a:prstGeom prst="rect">
+            <a:avLst/>
+          </a:prstGeom>
+          <a:solidFill>
+            <a:srgbClr val="F0F4F8"/>
+          </a:solidFill>
+          <a:ln>
+            <a:noFill/>
+          </a:ln>
+          <a:effectLst/>
+        </p:spPr>
+        <p:style>
+          <a:lnRef idx="1">
+            <a:schemeClr val="accent1"/>
+          </a:lnRef>
+          <a:fillRef idx="3">
+            <a:schemeClr val="accent1"/>
+          </a:fillRef>
+          <a:effectRef idx="2">
+            <a:schemeClr val="accent1"/>
+          </a:effectRef>
+          <a:fontRef idx="minor">
+            <a:schemeClr val="lt1"/>
+          </a:fontRef>
+        </p:style>
+        <p:txBody>
+          <a:bodyPr rtlCol="0" anchor="ctr"/>
+          <a:lstStyle/>
+          <a:p>
+            <a:pPr algn="ctr"/>
+          </a:p>
+        </p:txBody>
+      </p:sp>
+      <p:sp>
+        <p:nvSpPr>
+          <p:cNvPr id="6" name="TextBox 5"/>
+          <p:cNvSpPr txBox="1"/>
+          <p:nvPr/>
+        </p:nvSpPr>
+        <p:spPr>
+          <a:xfrm>
+            <a:off x="914400" y="1554480"/>
+            <a:ext cx="10332720" cy="4480560"/>
+          </a:xfrm>
+          <a:prstGeom prst="rect">
+            <a:avLst/>
+          </a:prstGeom>
+          <a:noFill/>
+        </p:spPr>
+        <p:txBody>
+          <a:bodyPr wrap="square">
+            <a:spAutoFit/>
+          </a:bodyPr>
+          <a:lstStyle/>
+          <a:p>
+            <a:r>
+              <a:rPr sz="2200" b="0">
+                <a:solidFill>
+                  <a:srgbClr val="0A1F33"/>
+                </a:solidFill>
+                <a:latin typeface="Calibri"/>
+              </a:rPr>
+              <a:t>En un suizo a 5 rondas, los rivales de Carla terminaron con 4, 3, 3, 2 y ½ puntos, y los de Diego con 3½, 3, 3, 2½ y 1. Ambos tienen 4 puntos. Calcula Buchholz y Buchholz con corte 1.</a:t>
+            </a:r>
+          </a:p>
+        </p:txBody>
+      </p:sp>
+    </p:spTree>
+  </p:cSld>
+  <p:clrMapOvr>
+    <a:masterClrMapping/>
+  </p:clrMapOvr>
+</p:sld>
+</file>
+
+<file path=ppt/slides/slide19.xml><?xml version="1.0" encoding="utf-8"?>
+<p:sld xmlns:a="http://schemas.openxmlformats.org/drawingml/2006/main" xmlns:p="http://schemas.openxmlformats.org/presentationml/2006/main" xmlns:r="http://schemas.openxmlformats.org/officeDocument/2006/relationships">
+  <p:cSld>
+    <p:spTree>
+      <p:nvGrpSpPr>
+        <p:cNvPr id="1" name=""/>
+        <p:cNvGrpSpPr/>
+        <p:nvPr/>
+      </p:nvGrpSpPr>
+      <p:grpSpPr/>
+      <p:sp>
+        <p:nvSpPr>
+          <p:cNvPr id="2" name="Oval 1"/>
+          <p:cNvSpPr/>
+          <p:nvPr/>
+        </p:nvSpPr>
+        <p:spPr>
+          <a:xfrm>
+            <a:off x="548640" y="502920"/>
+            <a:ext cx="502920" cy="502920"/>
+          </a:xfrm>
+          <a:prstGeom prst="ellipse">
+            <a:avLst/>
+          </a:prstGeom>
+          <a:solidFill>
+            <a:srgbClr val="DE911D"/>
+          </a:solidFill>
+          <a:ln>
+            <a:noFill/>
+          </a:ln>
+          <a:effectLst/>
+        </p:spPr>
+        <p:style>
+          <a:lnRef idx="1">
+            <a:schemeClr val="accent1"/>
+          </a:lnRef>
+          <a:fillRef idx="3">
+            <a:schemeClr val="accent1"/>
+          </a:fillRef>
+          <a:effectRef idx="2">
+            <a:schemeClr val="accent1"/>
+          </a:effectRef>
+          <a:fontRef idx="minor">
+            <a:schemeClr val="lt1"/>
+          </a:fontRef>
+        </p:style>
+        <p:txBody>
+          <a:bodyPr rtlCol="0" anchor="ctr"/>
+          <a:lstStyle/>
+          <a:p>
+            <a:pPr algn="ctr"/>
+          </a:p>
+        </p:txBody>
+      </p:sp>
+      <p:sp>
+        <p:nvSpPr>
+          <p:cNvPr id="3" name="TextBox 2"/>
+          <p:cNvSpPr txBox="1"/>
+          <p:nvPr/>
+        </p:nvSpPr>
+        <p:spPr>
+          <a:xfrm>
+            <a:off x="548640" y="502920"/>
+            <a:ext cx="502920" cy="502920"/>
+          </a:xfrm>
+          <a:prstGeom prst="rect">
+            <a:avLst/>
+          </a:prstGeom>
+          <a:noFill/>
+        </p:spPr>
+        <p:txBody>
+          <a:bodyPr wrap="square">
+            <a:spAutoFit/>
+          </a:bodyPr>
+          <a:lstStyle/>
+          <a:p>
+            <a:pPr algn="ctr"/>
+            <a:r>
+              <a:rPr sz="2000" b="0">
+                <a:solidFill>
+                  <a:srgbClr val="0A1F33"/>
+                </a:solidFill>
+                <a:latin typeface="Calibri"/>
+              </a:rPr>
+              <a:t>✎</a:t>
+            </a:r>
+          </a:p>
+        </p:txBody>
+      </p:sp>
+      <p:sp>
+        <p:nvSpPr>
+          <p:cNvPr id="4" name="TextBox 3"/>
+          <p:cNvSpPr txBox="1"/>
+          <p:nvPr/>
+        </p:nvSpPr>
+        <p:spPr>
+          <a:xfrm>
+            <a:off x="1234440" y="530352"/>
+            <a:ext cx="9144000" cy="457200"/>
+          </a:xfrm>
+          <a:prstGeom prst="rect">
+            <a:avLst/>
+          </a:prstGeom>
+          <a:noFill/>
+        </p:spPr>
+        <p:txBody>
+          <a:bodyPr wrap="square">
+            <a:spAutoFit/>
+          </a:bodyPr>
+          <a:lstStyle/>
+          <a:p>
+            <a:r>
+              <a:rPr sz="1400" b="1">
+                <a:solidFill>
+                  <a:srgbClr val="DE911D"/>
+                </a:solidFill>
+                <a:latin typeface="Calibri"/>
+              </a:rPr>
+              <a:t>EJERCICIO 4 DE 4</a:t>
+            </a:r>
+          </a:p>
+        </p:txBody>
+      </p:sp>
+      <p:sp>
+        <p:nvSpPr>
+          <p:cNvPr id="5" name="Rectangle 4"/>
+          <p:cNvSpPr/>
+          <p:nvPr/>
+        </p:nvSpPr>
+        <p:spPr>
+          <a:xfrm>
+            <a:off x="548640" y="1188720"/>
+            <a:ext cx="11064240" cy="5029200"/>
+          </a:xfrm>
+          <a:prstGeom prst="rect">
+            <a:avLst/>
+          </a:prstGeom>
+          <a:solidFill>
+            <a:srgbClr val="F0F4F8"/>
+          </a:solidFill>
+          <a:ln>
+            <a:noFill/>
+          </a:ln>
+          <a:effectLst/>
+        </p:spPr>
+        <p:style>
+          <a:lnRef idx="1">
+            <a:schemeClr val="accent1"/>
+          </a:lnRef>
+          <a:fillRef idx="3">
+            <a:schemeClr val="accent1"/>
+          </a:fillRef>
+          <a:effectRef idx="2">
+            <a:schemeClr val="accent1"/>
+          </a:effectRef>
+          <a:fontRef idx="minor">
+            <a:schemeClr val="lt1"/>
+          </a:fontRef>
+        </p:style>
+        <p:txBody>
+          <a:bodyPr rtlCol="0" anchor="ctr"/>
+          <a:lstStyle/>
+          <a:p>
+            <a:pPr algn="ctr"/>
+          </a:p>
+        </p:txBody>
+      </p:sp>
+      <p:sp>
+        <p:nvSpPr>
+          <p:cNvPr id="6" name="TextBox 5"/>
+          <p:cNvSpPr txBox="1"/>
+          <p:nvPr/>
+        </p:nvSpPr>
+        <p:spPr>
+          <a:xfrm>
+            <a:off x="914400" y="1554480"/>
+            <a:ext cx="10332720" cy="4480560"/>
+          </a:xfrm>
+          <a:prstGeom prst="rect">
+            <a:avLst/>
+          </a:prstGeom>
+          <a:noFill/>
+        </p:spPr>
+        <p:txBody>
+          <a:bodyPr wrap="square">
+            <a:spAutoFit/>
+          </a:bodyPr>
+          <a:lstStyle/>
+          <a:p>
+            <a:r>
+              <a:rPr sz="2200" b="0">
+                <a:solidFill>
+                  <a:srgbClr val="0A1F33"/>
+                </a:solidFill>
+                <a:latin typeface="Calibri"/>
+              </a:rPr>
+              <a:t>Ficha de lectura: con la normativa JDE vigente en la mano, anota para ajedrez la categoría, el ritmo, el sistema de competencia, los desempates en orden, el tiempo de incomparecencia y el plazo para presentar un reclamo.</a:t>
+            </a:r>
+          </a:p>
+        </p:txBody>
+      </p:sp>
+    </p:spTree>
+  </p:cSld>
+  <p:clrMapOvr>
+    <a:masterClrMapping/>
+  </p:clrMapOvr>
+</p:sld>
+</file>
+
 <file path=ppt/slides/slide2.xml><?xml version="1.0" encoding="utf-8"?>
 <p:sld xmlns:a="http://schemas.openxmlformats.org/drawingml/2006/main" xmlns:p="http://schemas.openxmlformats.org/presentationml/2006/main" xmlns:r="http://schemas.openxmlformats.org/officeDocument/2006/relationships">
   <p:cSld>
@@ -3565,7 +5787,7 @@
                 </a:solidFill>
                 <a:latin typeface="Calibri"/>
               </a:rPr>
-              <a:t>⚖</a:t>
+              <a:t>◎</a:t>
             </a:r>
           </a:p>
         </p:txBody>
@@ -3579,7 +5801,7 @@
         <p:spPr>
           <a:xfrm>
             <a:off x="1234440" y="530352"/>
-            <a:ext cx="7315200" cy="457200"/>
+            <a:ext cx="9144000" cy="457200"/>
           </a:xfrm>
           <a:prstGeom prst="rect">
             <a:avLst/>
@@ -3599,7 +5821,7 @@
                 </a:solidFill>
                 <a:latin typeface="Calibri"/>
               </a:rPr>
-              <a:t>CONTENIDO DE LA SESIÓN</a:t>
+              <a:t>OBJETIVOS DE LA SESIÓN</a:t>
             </a:r>
           </a:p>
         </p:txBody>
@@ -3690,8 +5912,8 @@
         </p:nvSpPr>
         <p:spPr>
           <a:xfrm>
-            <a:off x="1005840" y="2331720"/>
-            <a:ext cx="10241280" cy="3566160"/>
+            <a:off x="914400" y="2194560"/>
+            <a:ext cx="10332720" cy="3931920"/>
           </a:xfrm>
           <a:prstGeom prst="rect">
             <a:avLst/>
@@ -3704,14 +5926,559 @@
           </a:bodyPr>
           <a:lstStyle/>
           <a:p>
-            <a:r>
-              <a:rPr sz="1600" b="0">
+            <a:pPr>
+              <a:spcAft>
+                <a:spcPts val="800"/>
+              </a:spcAft>
+            </a:pPr>
+            <a:r>
+              <a:rPr sz="1800">
                 <a:solidFill>
                   <a:srgbClr val="334E68"/>
                 </a:solidFill>
                 <a:latin typeface="Calibri"/>
               </a:rPr>
-              <a:t>Apéndices de las Leyes de Ajedrez: ajedrez rápido y relámpago.</a:t>
+              <a:t>•  Clasificar un control de tiempo como clásico, rápido o relámpago con la fórmula de 60 jugadas.</a:t>
+            </a:r>
+          </a:p>
+          <a:p>
+            <a:pPr>
+              <a:spcAft>
+                <a:spcPts val="800"/>
+              </a:spcAft>
+            </a:pPr>
+            <a:r>
+              <a:rPr sz="1800">
+                <a:solidFill>
+                  <a:srgbClr val="334E68"/>
+                </a:solidFill>
+                <a:latin typeface="Calibri"/>
+              </a:rPr>
+              <a:t>•  Aplicar las diferencias de las rápidas y el relámpago, con y sin supervisión adecuada.</a:t>
+            </a:r>
+          </a:p>
+          <a:p>
+            <a:pPr>
+              <a:spcAft>
+                <a:spcPts val="800"/>
+              </a:spcAft>
+            </a:pPr>
+            <a:r>
+              <a:rPr sz="1800">
+                <a:solidFill>
+                  <a:srgbClr val="334E68"/>
+                </a:solidFill>
+                <a:latin typeface="Calibri"/>
+              </a:rPr>
+              <a:t>•  Calcular Buchholz, Buchholz con corte, Sonneborn-Berger y encuentro directo.</a:t>
+            </a:r>
+          </a:p>
+          <a:p>
+            <a:pPr>
+              <a:spcAft>
+                <a:spcPts val="800"/>
+              </a:spcAft>
+            </a:pPr>
+            <a:r>
+              <a:rPr sz="1800">
+                <a:solidFill>
+                  <a:srgbClr val="334E68"/>
+                </a:solidFill>
+                <a:latin typeface="Calibri"/>
+              </a:rPr>
+              <a:t>•  Ubicar en la normativa vigente de los JDE lo que el árbitro necesita antes de cada torneo.</a:t>
+            </a:r>
+          </a:p>
+        </p:txBody>
+      </p:sp>
+    </p:spTree>
+  </p:cSld>
+  <p:clrMapOvr>
+    <a:masterClrMapping/>
+  </p:clrMapOvr>
+</p:sld>
+</file>
+
+<file path=ppt/slides/slide20.xml><?xml version="1.0" encoding="utf-8"?>
+<p:sld xmlns:a="http://schemas.openxmlformats.org/drawingml/2006/main" xmlns:p="http://schemas.openxmlformats.org/presentationml/2006/main" xmlns:r="http://schemas.openxmlformats.org/officeDocument/2006/relationships">
+  <p:cSld>
+    <p:spTree>
+      <p:nvGrpSpPr>
+        <p:cNvPr id="1" name=""/>
+        <p:cNvGrpSpPr/>
+        <p:nvPr/>
+      </p:nvGrpSpPr>
+      <p:grpSpPr/>
+      <p:sp>
+        <p:nvSpPr>
+          <p:cNvPr id="2" name="Oval 1"/>
+          <p:cNvSpPr/>
+          <p:nvPr/>
+        </p:nvSpPr>
+        <p:spPr>
+          <a:xfrm>
+            <a:off x="548640" y="502920"/>
+            <a:ext cx="502920" cy="502920"/>
+          </a:xfrm>
+          <a:prstGeom prst="ellipse">
+            <a:avLst/>
+          </a:prstGeom>
+          <a:solidFill>
+            <a:srgbClr val="DE911D"/>
+          </a:solidFill>
+          <a:ln>
+            <a:noFill/>
+          </a:ln>
+          <a:effectLst/>
+        </p:spPr>
+        <p:style>
+          <a:lnRef idx="1">
+            <a:schemeClr val="accent1"/>
+          </a:lnRef>
+          <a:fillRef idx="3">
+            <a:schemeClr val="accent1"/>
+          </a:fillRef>
+          <a:effectRef idx="2">
+            <a:schemeClr val="accent1"/>
+          </a:effectRef>
+          <a:fontRef idx="minor">
+            <a:schemeClr val="lt1"/>
+          </a:fontRef>
+        </p:style>
+        <p:txBody>
+          <a:bodyPr rtlCol="0" anchor="ctr"/>
+          <a:lstStyle/>
+          <a:p>
+            <a:pPr algn="ctr"/>
+          </a:p>
+        </p:txBody>
+      </p:sp>
+      <p:sp>
+        <p:nvSpPr>
+          <p:cNvPr id="3" name="TextBox 2"/>
+          <p:cNvSpPr txBox="1"/>
+          <p:nvPr/>
+        </p:nvSpPr>
+        <p:spPr>
+          <a:xfrm>
+            <a:off x="548640" y="502920"/>
+            <a:ext cx="502920" cy="502920"/>
+          </a:xfrm>
+          <a:prstGeom prst="rect">
+            <a:avLst/>
+          </a:prstGeom>
+          <a:noFill/>
+        </p:spPr>
+        <p:txBody>
+          <a:bodyPr wrap="square">
+            <a:spAutoFit/>
+          </a:bodyPr>
+          <a:lstStyle/>
+          <a:p>
+            <a:pPr algn="ctr"/>
+            <a:r>
+              <a:rPr sz="2000" b="0">
+                <a:solidFill>
+                  <a:srgbClr val="0A1F33"/>
+                </a:solidFill>
+                <a:latin typeface="Calibri"/>
+              </a:rPr>
+              <a:t>?</a:t>
+            </a:r>
+          </a:p>
+        </p:txBody>
+      </p:sp>
+      <p:sp>
+        <p:nvSpPr>
+          <p:cNvPr id="4" name="TextBox 3"/>
+          <p:cNvSpPr txBox="1"/>
+          <p:nvPr/>
+        </p:nvSpPr>
+        <p:spPr>
+          <a:xfrm>
+            <a:off x="1234440" y="530352"/>
+            <a:ext cx="9144000" cy="457200"/>
+          </a:xfrm>
+          <a:prstGeom prst="rect">
+            <a:avLst/>
+          </a:prstGeom>
+          <a:noFill/>
+        </p:spPr>
+        <p:txBody>
+          <a:bodyPr wrap="square">
+            <a:spAutoFit/>
+          </a:bodyPr>
+          <a:lstStyle/>
+          <a:p>
+            <a:r>
+              <a:rPr sz="1400" b="1">
+                <a:solidFill>
+                  <a:srgbClr val="DE911D"/>
+                </a:solidFill>
+                <a:latin typeface="Calibri"/>
+              </a:rPr>
+              <a:t>QUIZ DE LA SESIÓN</a:t>
+            </a:r>
+          </a:p>
+        </p:txBody>
+      </p:sp>
+      <p:sp>
+        <p:nvSpPr>
+          <p:cNvPr id="5" name="Rectangle 4"/>
+          <p:cNvSpPr/>
+          <p:nvPr/>
+        </p:nvSpPr>
+        <p:spPr>
+          <a:xfrm>
+            <a:off x="548640" y="1188720"/>
+            <a:ext cx="11064240" cy="5029200"/>
+          </a:xfrm>
+          <a:prstGeom prst="rect">
+            <a:avLst/>
+          </a:prstGeom>
+          <a:solidFill>
+            <a:srgbClr val="F0F4F8"/>
+          </a:solidFill>
+          <a:ln>
+            <a:noFill/>
+          </a:ln>
+          <a:effectLst/>
+        </p:spPr>
+        <p:style>
+          <a:lnRef idx="1">
+            <a:schemeClr val="accent1"/>
+          </a:lnRef>
+          <a:fillRef idx="3">
+            <a:schemeClr val="accent1"/>
+          </a:fillRef>
+          <a:effectRef idx="2">
+            <a:schemeClr val="accent1"/>
+          </a:effectRef>
+          <a:fontRef idx="minor">
+            <a:schemeClr val="lt1"/>
+          </a:fontRef>
+        </p:style>
+        <p:txBody>
+          <a:bodyPr rtlCol="0" anchor="ctr"/>
+          <a:lstStyle/>
+          <a:p>
+            <a:pPr algn="ctr"/>
+          </a:p>
+        </p:txBody>
+      </p:sp>
+      <p:sp>
+        <p:nvSpPr>
+          <p:cNvPr id="6" name="TextBox 5"/>
+          <p:cNvSpPr txBox="1"/>
+          <p:nvPr/>
+        </p:nvSpPr>
+        <p:spPr>
+          <a:xfrm>
+            <a:off x="914400" y="1371600"/>
+            <a:ext cx="10332720" cy="4754880"/>
+          </a:xfrm>
+          <a:prstGeom prst="rect">
+            <a:avLst/>
+          </a:prstGeom>
+          <a:noFill/>
+        </p:spPr>
+        <p:txBody>
+          <a:bodyPr wrap="square">
+            <a:spAutoFit/>
+          </a:bodyPr>
+          <a:lstStyle/>
+          <a:p>
+            <a:pPr>
+              <a:spcAft>
+                <a:spcPts val="600"/>
+              </a:spcAft>
+            </a:pPr>
+            <a:r>
+              <a:rPr sz="1400">
+                <a:solidFill>
+                  <a:srgbClr val="334E68"/>
+                </a:solidFill>
+                <a:latin typeface="Calibri"/>
+              </a:rPr>
+              <a:t>1. ¿Cuál es el criterio de desempate que suma los puntajes finales de los rivales enfrentados?</a:t>
+            </a:r>
+          </a:p>
+          <a:p>
+            <a:pPr>
+              <a:spcAft>
+                <a:spcPts val="600"/>
+              </a:spcAft>
+            </a:pPr>
+            <a:r>
+              <a:rPr sz="1400">
+                <a:solidFill>
+                  <a:srgbClr val="334E68"/>
+                </a:solidFill>
+                <a:latin typeface="Calibri"/>
+              </a:rPr>
+              <a:t>2. ¿Qué distingue principalmente al ajedrez relámpago del ajedrez rápido?</a:t>
+            </a:r>
+          </a:p>
+          <a:p>
+            <a:pPr>
+              <a:spcAft>
+                <a:spcPts val="600"/>
+              </a:spcAft>
+            </a:pPr>
+            <a:r>
+              <a:rPr sz="1400">
+                <a:solidFill>
+                  <a:srgbClr val="334E68"/>
+                </a:solidFill>
+                <a:latin typeface="Calibri"/>
+              </a:rPr>
+              <a:t>3. ¿Cómo se clasifica un ritmo que tiene incremento?</a:t>
+            </a:r>
+          </a:p>
+          <a:p>
+            <a:pPr>
+              <a:spcAft>
+                <a:spcPts val="600"/>
+              </a:spcAft>
+            </a:pPr>
+            <a:r>
+              <a:rPr sz="1400">
+                <a:solidFill>
+                  <a:srgbClr val="334E68"/>
+                </a:solidFill>
+                <a:latin typeface="Calibri"/>
+              </a:rPr>
+              <a:t>4. ¿En qué tipo de torneo es habitual el Sonneborn-Berger?</a:t>
+            </a:r>
+          </a:p>
+          <a:p>
+            <a:pPr>
+              <a:spcAft>
+                <a:spcPts val="600"/>
+              </a:spcAft>
+            </a:pPr>
+            <a:r>
+              <a:rPr sz="1400">
+                <a:solidFill>
+                  <a:srgbClr val="334E68"/>
+                </a:solidFill>
+                <a:latin typeface="Calibri"/>
+              </a:rPr>
+              <a:t>5. Se agotó la lista de desempates y dos jugadores siguen empatados. ¿Qué corresponde?</a:t>
+            </a:r>
+          </a:p>
+          <a:p>
+            <a:pPr>
+              <a:spcAft>
+                <a:spcPts val="600"/>
+              </a:spcAft>
+            </a:pPr>
+            <a:r>
+              <a:rPr sz="1400">
+                <a:solidFill>
+                  <a:srgbClr val="334E68"/>
+                </a:solidFill>
+                <a:latin typeface="Calibri"/>
+              </a:rPr>
+              <a:t>6. En rápidas, ¿es obligatorio anotar las jugadas?</a:t>
+            </a:r>
+          </a:p>
+        </p:txBody>
+      </p:sp>
+    </p:spTree>
+  </p:cSld>
+  <p:clrMapOvr>
+    <a:masterClrMapping/>
+  </p:clrMapOvr>
+</p:sld>
+</file>
+
+<file path=ppt/slides/slide21.xml><?xml version="1.0" encoding="utf-8"?>
+<p:sld xmlns:a="http://schemas.openxmlformats.org/drawingml/2006/main" xmlns:p="http://schemas.openxmlformats.org/presentationml/2006/main" xmlns:r="http://schemas.openxmlformats.org/officeDocument/2006/relationships">
+  <p:cSld>
+    <p:spTree>
+      <p:nvGrpSpPr>
+        <p:cNvPr id="1" name=""/>
+        <p:cNvGrpSpPr/>
+        <p:nvPr/>
+      </p:nvGrpSpPr>
+      <p:grpSpPr/>
+      <p:sp>
+        <p:nvSpPr>
+          <p:cNvPr id="2" name="Rectangle 1"/>
+          <p:cNvSpPr/>
+          <p:nvPr/>
+        </p:nvSpPr>
+        <p:spPr>
+          <a:xfrm>
+            <a:off x="0" y="0"/>
+            <a:ext cx="12191695" cy="6858000"/>
+          </a:xfrm>
+          <a:prstGeom prst="rect">
+            <a:avLst/>
+          </a:prstGeom>
+          <a:solidFill>
+            <a:srgbClr val="0A1F33"/>
+          </a:solidFill>
+          <a:ln>
+            <a:noFill/>
+          </a:ln>
+          <a:effectLst/>
+        </p:spPr>
+        <p:style>
+          <a:lnRef idx="1">
+            <a:schemeClr val="accent1"/>
+          </a:lnRef>
+          <a:fillRef idx="3">
+            <a:schemeClr val="accent1"/>
+          </a:fillRef>
+          <a:effectRef idx="2">
+            <a:schemeClr val="accent1"/>
+          </a:effectRef>
+          <a:fontRef idx="minor">
+            <a:schemeClr val="lt1"/>
+          </a:fontRef>
+        </p:style>
+        <p:txBody>
+          <a:bodyPr rtlCol="0" anchor="ctr"/>
+          <a:lstStyle/>
+          <a:p>
+            <a:pPr algn="ctr"/>
+          </a:p>
+        </p:txBody>
+      </p:sp>
+      <p:sp>
+        <p:nvSpPr>
+          <p:cNvPr id="3" name="TextBox 2"/>
+          <p:cNvSpPr txBox="1"/>
+          <p:nvPr/>
+        </p:nvSpPr>
+        <p:spPr>
+          <a:xfrm>
+            <a:off x="548640" y="731520"/>
+            <a:ext cx="11064240" cy="457200"/>
+          </a:xfrm>
+          <a:prstGeom prst="rect">
+            <a:avLst/>
+          </a:prstGeom>
+          <a:noFill/>
+        </p:spPr>
+        <p:txBody>
+          <a:bodyPr wrap="square">
+            <a:spAutoFit/>
+          </a:bodyPr>
+          <a:lstStyle/>
+          <a:p>
+            <a:r>
+              <a:rPr sz="1400" b="1">
+                <a:solidFill>
+                  <a:srgbClr val="F0B429"/>
+                </a:solidFill>
+                <a:latin typeface="Calibri"/>
+              </a:rPr>
+              <a:t>TAREA PARA LA PRÓXIMA SESIÓN</a:t>
+            </a:r>
+          </a:p>
+        </p:txBody>
+      </p:sp>
+      <p:sp>
+        <p:nvSpPr>
+          <p:cNvPr id="4" name="TextBox 3"/>
+          <p:cNvSpPr txBox="1"/>
+          <p:nvPr/>
+        </p:nvSpPr>
+        <p:spPr>
+          <a:xfrm>
+            <a:off x="548640" y="1371600"/>
+            <a:ext cx="11064240" cy="2926080"/>
+          </a:xfrm>
+          <a:prstGeom prst="rect">
+            <a:avLst/>
+          </a:prstGeom>
+          <a:noFill/>
+        </p:spPr>
+        <p:txBody>
+          <a:bodyPr wrap="square">
+            <a:spAutoFit/>
+          </a:bodyPr>
+          <a:lstStyle/>
+          <a:p>
+            <a:r>
+              <a:rPr sz="2400" b="0">
+                <a:solidFill>
+                  <a:srgbClr val="FFFFFF"/>
+                </a:solidFill>
+                <a:latin typeface="Cambria"/>
+              </a:rPr>
+              <a:t>Analizar un caso de inscripción o de categorización de una persona estudiante y determinar el procedimiento correcto según la normativa JDE vigente.</a:t>
+            </a:r>
+          </a:p>
+        </p:txBody>
+      </p:sp>
+      <p:sp>
+        <p:nvSpPr>
+          <p:cNvPr id="5" name="TextBox 4"/>
+          <p:cNvSpPr txBox="1"/>
+          <p:nvPr/>
+        </p:nvSpPr>
+        <p:spPr>
+          <a:xfrm>
+            <a:off x="548640" y="4754880"/>
+            <a:ext cx="11064240" cy="914400"/>
+          </a:xfrm>
+          <a:prstGeom prst="rect">
+            <a:avLst/>
+          </a:prstGeom>
+          <a:noFill/>
+        </p:spPr>
+        <p:txBody>
+          <a:bodyPr wrap="square">
+            <a:spAutoFit/>
+          </a:bodyPr>
+          <a:lstStyle/>
+          <a:p>
+            <a:r>
+              <a:rPr sz="1800" b="0">
+                <a:solidFill>
+                  <a:srgbClr val="CADCFC"/>
+                </a:solidFill>
+                <a:latin typeface="Calibri"/>
+              </a:rPr>
+              <a:t>¿Dudas? Este es el momento. Gracias por tu participación.</a:t>
+            </a:r>
+          </a:p>
+        </p:txBody>
+      </p:sp>
+      <p:sp>
+        <p:nvSpPr>
+          <p:cNvPr id="6" name="TextBox 5"/>
+          <p:cNvSpPr txBox="1"/>
+          <p:nvPr/>
+        </p:nvSpPr>
+        <p:spPr>
+          <a:xfrm>
+            <a:off x="548640" y="6263640"/>
+            <a:ext cx="11064240" cy="365760"/>
+          </a:xfrm>
+          <a:prstGeom prst="rect">
+            <a:avLst/>
+          </a:prstGeom>
+          <a:noFill/>
+        </p:spPr>
+        <p:txBody>
+          <a:bodyPr wrap="square">
+            <a:spAutoFit/>
+          </a:bodyPr>
+          <a:lstStyle/>
+          <a:p>
+            <a:r>
+              <a:rPr sz="1200" b="0">
+                <a:solidFill>
+                  <a:srgbClr val="9FB3C8"/>
+                </a:solidFill>
+                <a:latin typeface="Calibri"/>
+              </a:rPr>
+              <a:t>Formación Ajedrez · Sesión 3 · ajedrez-integral.com</a:t>
             </a:r>
           </a:p>
         </p:txBody>
@@ -3808,7 +6575,7 @@
                 </a:solidFill>
                 <a:latin typeface="Calibri"/>
               </a:rPr>
-              <a:t>⚖</a:t>
+              <a:t>◷</a:t>
             </a:r>
           </a:p>
         </p:txBody>
@@ -3822,7 +6589,7 @@
         <p:spPr>
           <a:xfrm>
             <a:off x="1234440" y="530352"/>
-            <a:ext cx="7315200" cy="457200"/>
+            <a:ext cx="9144000" cy="457200"/>
           </a:xfrm>
           <a:prstGeom prst="rect">
             <a:avLst/>
@@ -3842,123 +6609,753 @@
                 </a:solidFill>
                 <a:latin typeface="Calibri"/>
               </a:rPr>
-              <a:t>CONTENIDO DE LA SESIÓN</a:t>
-            </a:r>
-          </a:p>
-        </p:txBody>
-      </p:sp>
-      <p:sp>
-        <p:nvSpPr>
-          <p:cNvPr id="5" name="TextBox 4"/>
-          <p:cNvSpPr txBox="1"/>
-          <p:nvPr/>
-        </p:nvSpPr>
-        <p:spPr>
-          <a:xfrm>
-            <a:off x="548640" y="1051560"/>
-            <a:ext cx="11064240" cy="822960"/>
-          </a:xfrm>
-          <a:prstGeom prst="rect">
-            <a:avLst/>
-          </a:prstGeom>
-          <a:noFill/>
-        </p:spPr>
-        <p:txBody>
-          <a:bodyPr wrap="square">
-            <a:spAutoFit/>
-          </a:bodyPr>
-          <a:lstStyle/>
-          <a:p>
-            <a:r>
-              <a:rPr sz="2400" b="1">
-                <a:solidFill>
-                  <a:srgbClr val="0A1F33"/>
-                </a:solidFill>
-                <a:latin typeface="Cambria"/>
-              </a:rPr>
-              <a:t>Apéndices de las Leyes de Ajedrez y normativa de los Juegos Deportivos Estudiantiles</a:t>
-            </a:r>
-          </a:p>
-        </p:txBody>
-      </p:sp>
-      <p:sp>
-        <p:nvSpPr>
-          <p:cNvPr id="6" name="Rectangle 5"/>
-          <p:cNvSpPr/>
-          <p:nvPr/>
-        </p:nvSpPr>
-        <p:spPr>
-          <a:xfrm>
-            <a:off x="548640" y="1965960"/>
-            <a:ext cx="11064240" cy="4297680"/>
-          </a:xfrm>
-          <a:prstGeom prst="rect">
-            <a:avLst/>
-          </a:prstGeom>
-          <a:solidFill>
-            <a:srgbClr val="F0F4F8"/>
-          </a:solidFill>
-          <a:ln>
-            <a:noFill/>
-          </a:ln>
-          <a:effectLst/>
-        </p:spPr>
-        <p:style>
-          <a:lnRef idx="1">
-            <a:schemeClr val="accent1"/>
-          </a:lnRef>
-          <a:fillRef idx="3">
-            <a:schemeClr val="accent1"/>
-          </a:fillRef>
-          <a:effectRef idx="2">
-            <a:schemeClr val="accent1"/>
-          </a:effectRef>
-          <a:fontRef idx="minor">
-            <a:schemeClr val="lt1"/>
-          </a:fontRef>
-        </p:style>
-        <p:txBody>
-          <a:bodyPr rtlCol="0" anchor="ctr"/>
-          <a:lstStyle/>
-          <a:p>
-            <a:pPr algn="ctr"/>
-          </a:p>
-        </p:txBody>
-      </p:sp>
-      <p:sp>
-        <p:nvSpPr>
-          <p:cNvPr id="7" name="TextBox 6"/>
-          <p:cNvSpPr txBox="1"/>
-          <p:nvPr/>
-        </p:nvSpPr>
-        <p:spPr>
-          <a:xfrm>
-            <a:off x="1005840" y="2331720"/>
-            <a:ext cx="10241280" cy="3566160"/>
-          </a:xfrm>
-          <a:prstGeom prst="rect">
-            <a:avLst/>
-          </a:prstGeom>
-          <a:noFill/>
-        </p:spPr>
-        <p:txBody>
-          <a:bodyPr wrap="square">
-            <a:spAutoFit/>
-          </a:bodyPr>
-          <a:lstStyle/>
-          <a:p>
-            <a:r>
-              <a:rPr sz="1600" b="0">
-                <a:solidFill>
-                  <a:srgbClr val="334E68"/>
-                </a:solidFill>
-                <a:latin typeface="Calibri"/>
-              </a:rPr>
-              <a:t>Sistemas de desempate (Buchholz, Sonneborn-Berger, enfrentamiento directo, entre otros).</a:t>
-            </a:r>
-          </a:p>
-        </p:txBody>
-      </p:sp>
+              <a:t>CRONOGRAMA DE LA SESIÓN · 5 HORAS</a:t>
+            </a:r>
+          </a:p>
+        </p:txBody>
+      </p:sp>
+      <p:graphicFrame>
+        <p:nvGraphicFramePr>
+          <p:cNvPr id="5" name="Table 4"/>
+          <p:cNvGraphicFramePr>
+            <a:graphicFrameLocks noGrp="1"/>
+          </p:cNvGraphicFramePr>
+          <p:nvPr/>
+        </p:nvGraphicFramePr>
+        <p:xfrm>
+          <a:off x="548640" y="1143000"/>
+          <a:ext cx="11064240" cy="5029200"/>
+        </p:xfrm>
+        <a:graphic>
+          <a:graphicData uri="http://schemas.openxmlformats.org/drawingml/2006/table">
+            <a:tbl>
+              <a:tblPr firstRow="1" bandRow="1">
+                <a:tableStyleId>{5C22544A-7EE6-4342-B048-85BDC9FD1C3A}</a:tableStyleId>
+              </a:tblPr>
+              <a:tblGrid>
+                <a:gridCol w="1737360"/>
+                <a:gridCol w="1188720"/>
+                <a:gridCol w="8138160"/>
+              </a:tblGrid>
+              <a:tr h="457200">
+                <a:tc>
+                  <a:txBody>
+                    <a:bodyPr/>
+                    <a:lstStyle/>
+                    <a:p>
+                      <a:r>
+                        <a:rPr sz="1300" b="1">
+                          <a:solidFill>
+                            <a:srgbClr val="FFFFFF"/>
+                          </a:solidFill>
+                        </a:rPr>
+                        <a:t>Tiempo</a:t>
+                      </a:r>
+                    </a:p>
+                  </a:txBody>
+                  <a:tcPr>
+                    <a:solidFill>
+                      <a:srgbClr val="102A43"/>
+                    </a:solidFill>
+                  </a:tcPr>
+                </a:tc>
+                <a:tc>
+                  <a:txBody>
+                    <a:bodyPr/>
+                    <a:lstStyle/>
+                    <a:p>
+                      <a:r>
+                        <a:rPr sz="1300" b="1">
+                          <a:solidFill>
+                            <a:srgbClr val="FFFFFF"/>
+                          </a:solidFill>
+                        </a:rPr>
+                        <a:t>Duración</a:t>
+                      </a:r>
+                    </a:p>
+                  </a:txBody>
+                  <a:tcPr>
+                    <a:solidFill>
+                      <a:srgbClr val="102A43"/>
+                    </a:solidFill>
+                  </a:tcPr>
+                </a:tc>
+                <a:tc>
+                  <a:txBody>
+                    <a:bodyPr/>
+                    <a:lstStyle/>
+                    <a:p>
+                      <a:r>
+                        <a:rPr sz="1300" b="1">
+                          <a:solidFill>
+                            <a:srgbClr val="FFFFFF"/>
+                          </a:solidFill>
+                        </a:rPr>
+                        <a:t>Actividad</a:t>
+                      </a:r>
+                    </a:p>
+                  </a:txBody>
+                  <a:tcPr>
+                    <a:solidFill>
+                      <a:srgbClr val="102A43"/>
+                    </a:solidFill>
+                  </a:tcPr>
+                </a:tc>
+              </a:tr>
+              <a:tr h="457200">
+                <a:tc>
+                  <a:txBody>
+                    <a:bodyPr/>
+                    <a:lstStyle/>
+                    <a:p>
+                      <a:r>
+                        <a:rPr sz="1200" b="0">
+                          <a:solidFill>
+                            <a:srgbClr val="334E68"/>
+                          </a:solidFill>
+                        </a:rPr>
+                        <a:t>0:00 – 0:15</a:t>
+                      </a:r>
+                    </a:p>
+                  </a:txBody>
+                  <a:tcPr>
+                    <a:solidFill>
+                      <a:srgbClr val="F0F4F8"/>
+                    </a:solidFill>
+                  </a:tcPr>
+                </a:tc>
+                <a:tc>
+                  <a:txBody>
+                    <a:bodyPr/>
+                    <a:lstStyle/>
+                    <a:p>
+                      <a:r>
+                        <a:rPr sz="1200" b="0">
+                          <a:solidFill>
+                            <a:srgbClr val="334E68"/>
+                          </a:solidFill>
+                        </a:rPr>
+                        <a:t>15 min</a:t>
+                      </a:r>
+                    </a:p>
+                  </a:txBody>
+                  <a:tcPr>
+                    <a:solidFill>
+                      <a:srgbClr val="F0F4F8"/>
+                    </a:solidFill>
+                  </a:tcPr>
+                </a:tc>
+                <a:tc>
+                  <a:txBody>
+                    <a:bodyPr/>
+                    <a:lstStyle/>
+                    <a:p>
+                      <a:r>
+                        <a:rPr sz="1200" b="0">
+                          <a:solidFill>
+                            <a:srgbClr val="334E68"/>
+                          </a:solidFill>
+                        </a:rPr>
+                        <a:t>Repaso y revisión de la tarea</a:t>
+                      </a:r>
+                    </a:p>
+                  </a:txBody>
+                  <a:tcPr>
+                    <a:solidFill>
+                      <a:srgbClr val="F0F4F8"/>
+                    </a:solidFill>
+                  </a:tcPr>
+                </a:tc>
+              </a:tr>
+              <a:tr h="457200">
+                <a:tc>
+                  <a:txBody>
+                    <a:bodyPr/>
+                    <a:lstStyle/>
+                    <a:p>
+                      <a:r>
+                        <a:rPr sz="1200" b="0">
+                          <a:solidFill>
+                            <a:srgbClr val="334E68"/>
+                          </a:solidFill>
+                        </a:rPr>
+                        <a:t>0:15 – 0:55</a:t>
+                      </a:r>
+                    </a:p>
+                  </a:txBody>
+                  <a:tcPr>
+                    <a:solidFill>
+                      <a:srgbClr val="FFFFFF"/>
+                    </a:solidFill>
+                  </a:tcPr>
+                </a:tc>
+                <a:tc>
+                  <a:txBody>
+                    <a:bodyPr/>
+                    <a:lstStyle/>
+                    <a:p>
+                      <a:r>
+                        <a:rPr sz="1200" b="0">
+                          <a:solidFill>
+                            <a:srgbClr val="334E68"/>
+                          </a:solidFill>
+                        </a:rPr>
+                        <a:t>40 min</a:t>
+                      </a:r>
+                    </a:p>
+                  </a:txBody>
+                  <a:tcPr>
+                    <a:solidFill>
+                      <a:srgbClr val="FFFFFF"/>
+                    </a:solidFill>
+                  </a:tcPr>
+                </a:tc>
+                <a:tc>
+                  <a:txBody>
+                    <a:bodyPr/>
+                    <a:lstStyle/>
+                    <a:p>
+                      <a:r>
+                        <a:rPr sz="1200" b="0">
+                          <a:solidFill>
+                            <a:srgbClr val="334E68"/>
+                          </a:solidFill>
+                        </a:rPr>
+                        <a:t>Ritmos de juego: los apéndices A y B</a:t>
+                      </a:r>
+                    </a:p>
+                  </a:txBody>
+                  <a:tcPr>
+                    <a:solidFill>
+                      <a:srgbClr val="FFFFFF"/>
+                    </a:solidFill>
+                  </a:tcPr>
+                </a:tc>
+              </a:tr>
+              <a:tr h="457200">
+                <a:tc>
+                  <a:txBody>
+                    <a:bodyPr/>
+                    <a:lstStyle/>
+                    <a:p>
+                      <a:r>
+                        <a:rPr sz="1200" b="0">
+                          <a:solidFill>
+                            <a:srgbClr val="334E68"/>
+                          </a:solidFill>
+                        </a:rPr>
+                        <a:t>0:55 – 1:35</a:t>
+                      </a:r>
+                    </a:p>
+                  </a:txBody>
+                  <a:tcPr>
+                    <a:solidFill>
+                      <a:srgbClr val="F0F4F8"/>
+                    </a:solidFill>
+                  </a:tcPr>
+                </a:tc>
+                <a:tc>
+                  <a:txBody>
+                    <a:bodyPr/>
+                    <a:lstStyle/>
+                    <a:p>
+                      <a:r>
+                        <a:rPr sz="1200" b="0">
+                          <a:solidFill>
+                            <a:srgbClr val="334E68"/>
+                          </a:solidFill>
+                        </a:rPr>
+                        <a:t>40 min</a:t>
+                      </a:r>
+                    </a:p>
+                  </a:txBody>
+                  <a:tcPr>
+                    <a:solidFill>
+                      <a:srgbClr val="F0F4F8"/>
+                    </a:solidFill>
+                  </a:tcPr>
+                </a:tc>
+                <a:tc>
+                  <a:txBody>
+                    <a:bodyPr/>
+                    <a:lstStyle/>
+                    <a:p>
+                      <a:r>
+                        <a:rPr sz="1200" b="0">
+                          <a:solidFill>
+                            <a:srgbClr val="334E68"/>
+                          </a:solidFill>
+                        </a:rPr>
+                        <a:t>Rápidas y relámpago en la sala</a:t>
+                      </a:r>
+                    </a:p>
+                  </a:txBody>
+                  <a:tcPr>
+                    <a:solidFill>
+                      <a:srgbClr val="F0F4F8"/>
+                    </a:solidFill>
+                  </a:tcPr>
+                </a:tc>
+              </a:tr>
+              <a:tr h="457200">
+                <a:tc>
+                  <a:txBody>
+                    <a:bodyPr/>
+                    <a:lstStyle/>
+                    <a:p>
+                      <a:r>
+                        <a:rPr sz="1200" b="1">
+                          <a:solidFill>
+                            <a:srgbClr val="DE911D"/>
+                          </a:solidFill>
+                        </a:rPr>
+                        <a:t>1:35 – 1:50</a:t>
+                      </a:r>
+                    </a:p>
+                  </a:txBody>
+                  <a:tcPr>
+                    <a:solidFill>
+                      <a:srgbClr val="FFFFFF"/>
+                    </a:solidFill>
+                  </a:tcPr>
+                </a:tc>
+                <a:tc>
+                  <a:txBody>
+                    <a:bodyPr/>
+                    <a:lstStyle/>
+                    <a:p>
+                      <a:r>
+                        <a:rPr sz="1200" b="1">
+                          <a:solidFill>
+                            <a:srgbClr val="DE911D"/>
+                          </a:solidFill>
+                        </a:rPr>
+                        <a:t>15 min</a:t>
+                      </a:r>
+                    </a:p>
+                  </a:txBody>
+                  <a:tcPr>
+                    <a:solidFill>
+                      <a:srgbClr val="FFFFFF"/>
+                    </a:solidFill>
+                  </a:tcPr>
+                </a:tc>
+                <a:tc>
+                  <a:txBody>
+                    <a:bodyPr/>
+                    <a:lstStyle/>
+                    <a:p>
+                      <a:r>
+                        <a:rPr sz="1200" b="1">
+                          <a:solidFill>
+                            <a:srgbClr val="DE911D"/>
+                          </a:solidFill>
+                        </a:rPr>
+                        <a:t>Receso</a:t>
+                      </a:r>
+                    </a:p>
+                  </a:txBody>
+                  <a:tcPr>
+                    <a:solidFill>
+                      <a:srgbClr val="FFFFFF"/>
+                    </a:solidFill>
+                  </a:tcPr>
+                </a:tc>
+              </a:tr>
+              <a:tr h="457200">
+                <a:tc>
+                  <a:txBody>
+                    <a:bodyPr/>
+                    <a:lstStyle/>
+                    <a:p>
+                      <a:r>
+                        <a:rPr sz="1200" b="0">
+                          <a:solidFill>
+                            <a:srgbClr val="334E68"/>
+                          </a:solidFill>
+                        </a:rPr>
+                        <a:t>1:50 – 2:35</a:t>
+                      </a:r>
+                    </a:p>
+                  </a:txBody>
+                  <a:tcPr>
+                    <a:solidFill>
+                      <a:srgbClr val="F0F4F8"/>
+                    </a:solidFill>
+                  </a:tcPr>
+                </a:tc>
+                <a:tc>
+                  <a:txBody>
+                    <a:bodyPr/>
+                    <a:lstStyle/>
+                    <a:p>
+                      <a:r>
+                        <a:rPr sz="1200" b="0">
+                          <a:solidFill>
+                            <a:srgbClr val="334E68"/>
+                          </a:solidFill>
+                        </a:rPr>
+                        <a:t>45 min</a:t>
+                      </a:r>
+                    </a:p>
+                  </a:txBody>
+                  <a:tcPr>
+                    <a:solidFill>
+                      <a:srgbClr val="F0F4F8"/>
+                    </a:solidFill>
+                  </a:tcPr>
+                </a:tc>
+                <a:tc>
+                  <a:txBody>
+                    <a:bodyPr/>
+                    <a:lstStyle/>
+                    <a:p>
+                      <a:r>
+                        <a:rPr sz="1200" b="0">
+                          <a:solidFill>
+                            <a:srgbClr val="334E68"/>
+                          </a:solidFill>
+                        </a:rPr>
+                        <a:t>Sistemas de desempate</a:t>
+                      </a:r>
+                    </a:p>
+                  </a:txBody>
+                  <a:tcPr>
+                    <a:solidFill>
+                      <a:srgbClr val="F0F4F8"/>
+                    </a:solidFill>
+                  </a:tcPr>
+                </a:tc>
+              </a:tr>
+              <a:tr h="457200">
+                <a:tc>
+                  <a:txBody>
+                    <a:bodyPr/>
+                    <a:lstStyle/>
+                    <a:p>
+                      <a:r>
+                        <a:rPr sz="1200" b="0">
+                          <a:solidFill>
+                            <a:srgbClr val="334E68"/>
+                          </a:solidFill>
+                        </a:rPr>
+                        <a:t>2:35 – 3:05</a:t>
+                      </a:r>
+                    </a:p>
+                  </a:txBody>
+                  <a:tcPr>
+                    <a:solidFill>
+                      <a:srgbClr val="FFFFFF"/>
+                    </a:solidFill>
+                  </a:tcPr>
+                </a:tc>
+                <a:tc>
+                  <a:txBody>
+                    <a:bodyPr/>
+                    <a:lstStyle/>
+                    <a:p>
+                      <a:r>
+                        <a:rPr sz="1200" b="0">
+                          <a:solidFill>
+                            <a:srgbClr val="334E68"/>
+                          </a:solidFill>
+                        </a:rPr>
+                        <a:t>30 min</a:t>
+                      </a:r>
+                    </a:p>
+                  </a:txBody>
+                  <a:tcPr>
+                    <a:solidFill>
+                      <a:srgbClr val="FFFFFF"/>
+                    </a:solidFill>
+                  </a:tcPr>
+                </a:tc>
+                <a:tc>
+                  <a:txBody>
+                    <a:bodyPr/>
+                    <a:lstStyle/>
+                    <a:p>
+                      <a:r>
+                        <a:rPr sz="1200" b="0">
+                          <a:solidFill>
+                            <a:srgbClr val="334E68"/>
+                          </a:solidFill>
+                        </a:rPr>
+                        <a:t>Normativa de los Juegos Deportivos Estudiantiles</a:t>
+                      </a:r>
+                    </a:p>
+                  </a:txBody>
+                  <a:tcPr>
+                    <a:solidFill>
+                      <a:srgbClr val="FFFFFF"/>
+                    </a:solidFill>
+                  </a:tcPr>
+                </a:tc>
+              </a:tr>
+              <a:tr h="457200">
+                <a:tc>
+                  <a:txBody>
+                    <a:bodyPr/>
+                    <a:lstStyle/>
+                    <a:p>
+                      <a:r>
+                        <a:rPr sz="1200" b="1">
+                          <a:solidFill>
+                            <a:srgbClr val="DE911D"/>
+                          </a:solidFill>
+                        </a:rPr>
+                        <a:t>3:05 – 3:20</a:t>
+                      </a:r>
+                    </a:p>
+                  </a:txBody>
+                  <a:tcPr>
+                    <a:solidFill>
+                      <a:srgbClr val="F0F4F8"/>
+                    </a:solidFill>
+                  </a:tcPr>
+                </a:tc>
+                <a:tc>
+                  <a:txBody>
+                    <a:bodyPr/>
+                    <a:lstStyle/>
+                    <a:p>
+                      <a:r>
+                        <a:rPr sz="1200" b="1">
+                          <a:solidFill>
+                            <a:srgbClr val="DE911D"/>
+                          </a:solidFill>
+                        </a:rPr>
+                        <a:t>15 min</a:t>
+                      </a:r>
+                    </a:p>
+                  </a:txBody>
+                  <a:tcPr>
+                    <a:solidFill>
+                      <a:srgbClr val="F0F4F8"/>
+                    </a:solidFill>
+                  </a:tcPr>
+                </a:tc>
+                <a:tc>
+                  <a:txBody>
+                    <a:bodyPr/>
+                    <a:lstStyle/>
+                    <a:p>
+                      <a:r>
+                        <a:rPr sz="1200" b="1">
+                          <a:solidFill>
+                            <a:srgbClr val="DE911D"/>
+                          </a:solidFill>
+                        </a:rPr>
+                        <a:t>Receso</a:t>
+                      </a:r>
+                    </a:p>
+                  </a:txBody>
+                  <a:tcPr>
+                    <a:solidFill>
+                      <a:srgbClr val="F0F4F8"/>
+                    </a:solidFill>
+                  </a:tcPr>
+                </a:tc>
+              </a:tr>
+              <a:tr h="457200">
+                <a:tc>
+                  <a:txBody>
+                    <a:bodyPr/>
+                    <a:lstStyle/>
+                    <a:p>
+                      <a:r>
+                        <a:rPr sz="1200" b="0">
+                          <a:solidFill>
+                            <a:srgbClr val="334E68"/>
+                          </a:solidFill>
+                        </a:rPr>
+                        <a:t>3:20 – 4:10</a:t>
+                      </a:r>
+                    </a:p>
+                  </a:txBody>
+                  <a:tcPr>
+                    <a:solidFill>
+                      <a:srgbClr val="FFFFFF"/>
+                    </a:solidFill>
+                  </a:tcPr>
+                </a:tc>
+                <a:tc>
+                  <a:txBody>
+                    <a:bodyPr/>
+                    <a:lstStyle/>
+                    <a:p>
+                      <a:r>
+                        <a:rPr sz="1200" b="0">
+                          <a:solidFill>
+                            <a:srgbClr val="334E68"/>
+                          </a:solidFill>
+                        </a:rPr>
+                        <a:t>50 min</a:t>
+                      </a:r>
+                    </a:p>
+                  </a:txBody>
+                  <a:tcPr>
+                    <a:solidFill>
+                      <a:srgbClr val="FFFFFF"/>
+                    </a:solidFill>
+                  </a:tcPr>
+                </a:tc>
+                <a:tc>
+                  <a:txBody>
+                    <a:bodyPr/>
+                    <a:lstStyle/>
+                    <a:p>
+                      <a:r>
+                        <a:rPr sz="1200" b="0">
+                          <a:solidFill>
+                            <a:srgbClr val="334E68"/>
+                          </a:solidFill>
+                        </a:rPr>
+                        <a:t>Práctica: cálculo de desempates</a:t>
+                      </a:r>
+                    </a:p>
+                  </a:txBody>
+                  <a:tcPr>
+                    <a:solidFill>
+                      <a:srgbClr val="FFFFFF"/>
+                    </a:solidFill>
+                  </a:tcPr>
+                </a:tc>
+              </a:tr>
+              <a:tr h="457200">
+                <a:tc>
+                  <a:txBody>
+                    <a:bodyPr/>
+                    <a:lstStyle/>
+                    <a:p>
+                      <a:r>
+                        <a:rPr sz="1200" b="0">
+                          <a:solidFill>
+                            <a:srgbClr val="334E68"/>
+                          </a:solidFill>
+                        </a:rPr>
+                        <a:t>4:10 – 4:40</a:t>
+                      </a:r>
+                    </a:p>
+                  </a:txBody>
+                  <a:tcPr>
+                    <a:solidFill>
+                      <a:srgbClr val="F0F4F8"/>
+                    </a:solidFill>
+                  </a:tcPr>
+                </a:tc>
+                <a:tc>
+                  <a:txBody>
+                    <a:bodyPr/>
+                    <a:lstStyle/>
+                    <a:p>
+                      <a:r>
+                        <a:rPr sz="1200" b="0">
+                          <a:solidFill>
+                            <a:srgbClr val="334E68"/>
+                          </a:solidFill>
+                        </a:rPr>
+                        <a:t>30 min</a:t>
+                      </a:r>
+                    </a:p>
+                  </a:txBody>
+                  <a:tcPr>
+                    <a:solidFill>
+                      <a:srgbClr val="F0F4F8"/>
+                    </a:solidFill>
+                  </a:tcPr>
+                </a:tc>
+                <a:tc>
+                  <a:txBody>
+                    <a:bodyPr/>
+                    <a:lstStyle/>
+                    <a:p>
+                      <a:r>
+                        <a:rPr sz="1200" b="0">
+                          <a:solidFill>
+                            <a:srgbClr val="334E68"/>
+                          </a:solidFill>
+                        </a:rPr>
+                        <a:t>Quiz de la sesión</a:t>
+                      </a:r>
+                    </a:p>
+                  </a:txBody>
+                  <a:tcPr>
+                    <a:solidFill>
+                      <a:srgbClr val="F0F4F8"/>
+                    </a:solidFill>
+                  </a:tcPr>
+                </a:tc>
+              </a:tr>
+              <a:tr h="457200">
+                <a:tc>
+                  <a:txBody>
+                    <a:bodyPr/>
+                    <a:lstStyle/>
+                    <a:p>
+                      <a:r>
+                        <a:rPr sz="1200" b="0">
+                          <a:solidFill>
+                            <a:srgbClr val="334E68"/>
+                          </a:solidFill>
+                        </a:rPr>
+                        <a:t>4:40 – 5:00</a:t>
+                      </a:r>
+                    </a:p>
+                  </a:txBody>
+                  <a:tcPr>
+                    <a:solidFill>
+                      <a:srgbClr val="FFFFFF"/>
+                    </a:solidFill>
+                  </a:tcPr>
+                </a:tc>
+                <a:tc>
+                  <a:txBody>
+                    <a:bodyPr/>
+                    <a:lstStyle/>
+                    <a:p>
+                      <a:r>
+                        <a:rPr sz="1200" b="0">
+                          <a:solidFill>
+                            <a:srgbClr val="334E68"/>
+                          </a:solidFill>
+                        </a:rPr>
+                        <a:t>20 min</a:t>
+                      </a:r>
+                    </a:p>
+                  </a:txBody>
+                  <a:tcPr>
+                    <a:solidFill>
+                      <a:srgbClr val="FFFFFF"/>
+                    </a:solidFill>
+                  </a:tcPr>
+                </a:tc>
+                <a:tc>
+                  <a:txBody>
+                    <a:bodyPr/>
+                    <a:lstStyle/>
+                    <a:p>
+                      <a:r>
+                        <a:rPr sz="1200" b="0">
+                          <a:solidFill>
+                            <a:srgbClr val="334E68"/>
+                          </a:solidFill>
+                        </a:rPr>
+                        <a:t>Cierre</a:t>
+                      </a:r>
+                    </a:p>
+                  </a:txBody>
+                  <a:tcPr>
+                    <a:solidFill>
+                      <a:srgbClr val="FFFFFF"/>
+                    </a:solidFill>
+                  </a:tcPr>
+                </a:tc>
+              </a:tr>
+            </a:tbl>
+          </a:graphicData>
+        </a:graphic>
+      </p:graphicFrame>
     </p:spTree>
   </p:cSld>
   <p:clrMapOvr>
@@ -4065,7 +7462,7 @@
         <p:spPr>
           <a:xfrm>
             <a:off x="1234440" y="530352"/>
-            <a:ext cx="7315200" cy="457200"/>
+            <a:ext cx="9144000" cy="457200"/>
           </a:xfrm>
           <a:prstGeom prst="rect">
             <a:avLst/>
@@ -4085,7 +7482,7 @@
                 </a:solidFill>
                 <a:latin typeface="Calibri"/>
               </a:rPr>
-              <a:t>CONTENIDO DE LA SESIÓN</a:t>
+              <a:t>CONTENIDO PARA VER EN CLASE</a:t>
             </a:r>
           </a:p>
         </p:txBody>
@@ -4113,13 +7510,13 @@
           <a:lstStyle/>
           <a:p>
             <a:r>
-              <a:rPr sz="2400" b="1">
+              <a:rPr sz="2600" b="1">
                 <a:solidFill>
                   <a:srgbClr val="0A1F33"/>
                 </a:solidFill>
                 <a:latin typeface="Cambria"/>
               </a:rPr>
-              <a:t>Apéndices de las Leyes de Ajedrez y normativa de los Juegos Deportivos Estudiantiles</a:t>
+              <a:t>Cómo se clasifica un ritmo</a:t>
             </a:r>
           </a:p>
         </p:txBody>
@@ -4132,8 +7529,8 @@
         </p:nvSpPr>
         <p:spPr>
           <a:xfrm>
-            <a:off x="548640" y="1965960"/>
-            <a:ext cx="11064240" cy="4297680"/>
+            <a:off x="548640" y="1874519"/>
+            <a:ext cx="11064240" cy="4389120"/>
           </a:xfrm>
           <a:prstGeom prst="rect">
             <a:avLst/>
@@ -4176,8 +7573,8 @@
         </p:nvSpPr>
         <p:spPr>
           <a:xfrm>
-            <a:off x="1005840" y="2331720"/>
-            <a:ext cx="10241280" cy="3566160"/>
+            <a:off x="914400" y="2011680"/>
+            <a:ext cx="10332720" cy="1371600"/>
           </a:xfrm>
           <a:prstGeom prst="rect">
             <a:avLst/>
@@ -4191,13 +7588,134 @@
           <a:lstStyle/>
           <a:p>
             <a:r>
-              <a:rPr sz="1600" b="0">
+              <a:rPr sz="1500" b="0">
+                <a:solidFill>
+                  <a:srgbClr val="0A1F33"/>
+                </a:solidFill>
+                <a:latin typeface="Calibri"/>
+              </a:rPr>
+              <a:t>Para clasificar un control de tiempo se supone una partida de 60 jugadas: se suma el tiempo base más 60 veces el incremento. Con 10 minutos o menos por jugador es relámpago; con más de 10 y menos de 60 es rápidas; con 60 o más es ritmo clásico.</a:t>
+            </a:r>
+          </a:p>
+        </p:txBody>
+      </p:sp>
+      <p:sp>
+        <p:nvSpPr>
+          <p:cNvPr id="8" name="TextBox 7"/>
+          <p:cNvSpPr txBox="1"/>
+          <p:nvPr/>
+        </p:nvSpPr>
+        <p:spPr>
+          <a:xfrm>
+            <a:off x="914400" y="3429000"/>
+            <a:ext cx="10332720" cy="2743200"/>
+          </a:xfrm>
+          <a:prstGeom prst="rect">
+            <a:avLst/>
+          </a:prstGeom>
+          <a:noFill/>
+        </p:spPr>
+        <p:txBody>
+          <a:bodyPr wrap="square">
+            <a:spAutoFit/>
+          </a:bodyPr>
+          <a:lstStyle/>
+          <a:p>
+            <a:pPr>
+              <a:spcAft>
+                <a:spcPts val="800"/>
+              </a:spcAft>
+            </a:pPr>
+            <a:r>
+              <a:rPr sz="1500">
                 <a:solidFill>
                   <a:srgbClr val="334E68"/>
                 </a:solidFill>
                 <a:latin typeface="Calibri"/>
               </a:rPr>
-              <a:t>Normativa vigente de los Juegos Deportivos Estudiantiles: categorías, requisitos y procedimientos.</a:t>
+              <a:t>•  3 min + 2 s: 3 + 2 = 5 minutos, relámpago.</a:t>
+            </a:r>
+          </a:p>
+          <a:p>
+            <a:pPr>
+              <a:spcAft>
+                <a:spcPts val="800"/>
+              </a:spcAft>
+            </a:pPr>
+            <a:r>
+              <a:rPr sz="1500">
+                <a:solidFill>
+                  <a:srgbClr val="334E68"/>
+                </a:solidFill>
+                <a:latin typeface="Calibri"/>
+              </a:rPr>
+              <a:t>•  15 min + 10 s: 15 + 10 = 25 minutos, rápidas.</a:t>
+            </a:r>
+          </a:p>
+          <a:p>
+            <a:pPr>
+              <a:spcAft>
+                <a:spcPts val="800"/>
+              </a:spcAft>
+            </a:pPr>
+            <a:r>
+              <a:rPr sz="1500">
+                <a:solidFill>
+                  <a:srgbClr val="334E68"/>
+                </a:solidFill>
+                <a:latin typeface="Calibri"/>
+              </a:rPr>
+              <a:t>•  90 min + 30 s: 90 + 30 = 120 minutos, clásico.</a:t>
+            </a:r>
+          </a:p>
+          <a:p>
+            <a:pPr>
+              <a:spcAft>
+                <a:spcPts val="800"/>
+              </a:spcAft>
+            </a:pPr>
+            <a:r>
+              <a:rPr sz="1500">
+                <a:solidFill>
+                  <a:srgbClr val="334E68"/>
+                </a:solidFill>
+                <a:latin typeface="Calibri"/>
+              </a:rPr>
+              <a:t>•  En rápidas y relámpago rigen las Leyes con los cambios que fijan sus apéndices.</a:t>
+            </a:r>
+          </a:p>
+        </p:txBody>
+      </p:sp>
+      <p:sp>
+        <p:nvSpPr>
+          <p:cNvPr id="9" name="TextBox 8"/>
+          <p:cNvSpPr txBox="1"/>
+          <p:nvPr/>
+        </p:nvSpPr>
+        <p:spPr>
+          <a:xfrm>
+            <a:off x="548640" y="6355080"/>
+            <a:ext cx="11064240" cy="365760"/>
+          </a:xfrm>
+          <a:prstGeom prst="rect">
+            <a:avLst/>
+          </a:prstGeom>
+          <a:noFill/>
+        </p:spPr>
+        <p:txBody>
+          <a:bodyPr wrap="square">
+            <a:spAutoFit/>
+          </a:bodyPr>
+          <a:lstStyle/>
+          <a:p>
+            <a:r>
+              <a:rPr sz="1100" b="0">
+                <a:solidFill>
+                  <a:srgbClr val="627D98"/>
+                </a:solidFill>
+                <a:latin typeface="Calibri"/>
+              </a:rPr>
+              <a:t>Fuente: Leyes del Ajedrez 2023 (Handbook E.I.01), apéndices A.1 y B.1</a:t>
             </a:r>
           </a:p>
         </p:txBody>
@@ -4222,102 +7740,14 @@
       <p:grpSpPr/>
       <p:sp>
         <p:nvSpPr>
-          <p:cNvPr id="2" name="Rectangle 1"/>
+          <p:cNvPr id="2" name="Oval 1"/>
           <p:cNvSpPr/>
           <p:nvPr/>
         </p:nvSpPr>
         <p:spPr>
           <a:xfrm>
-            <a:off x="0" y="0"/>
-            <a:ext cx="12191695" cy="6858000"/>
-          </a:xfrm>
-          <a:prstGeom prst="rect">
-            <a:avLst/>
-          </a:prstGeom>
-          <a:solidFill>
-            <a:srgbClr val="102A43"/>
-          </a:solidFill>
-          <a:ln>
-            <a:noFill/>
-          </a:ln>
-          <a:effectLst/>
-        </p:spPr>
-        <p:style>
-          <a:lnRef idx="1">
-            <a:schemeClr val="accent1"/>
-          </a:lnRef>
-          <a:fillRef idx="3">
-            <a:schemeClr val="accent1"/>
-          </a:fillRef>
-          <a:effectRef idx="2">
-            <a:schemeClr val="accent1"/>
-          </a:effectRef>
-          <a:fontRef idx="minor">
-            <a:schemeClr val="lt1"/>
-          </a:fontRef>
-        </p:style>
-        <p:txBody>
-          <a:bodyPr rtlCol="0" anchor="ctr"/>
-          <a:lstStyle/>
-          <a:p>
-            <a:pPr algn="ctr"/>
-          </a:p>
-        </p:txBody>
-      </p:sp>
-      <p:sp>
-        <p:nvSpPr>
-          <p:cNvPr id="3" name="Oval 2"/>
-          <p:cNvSpPr/>
-          <p:nvPr/>
-        </p:nvSpPr>
-        <p:spPr>
-          <a:xfrm>
-            <a:off x="-1280160" y="-1463040"/>
-            <a:ext cx="4114800" cy="4114800"/>
-          </a:xfrm>
-          <a:prstGeom prst="ellipse">
-            <a:avLst/>
-          </a:prstGeom>
-          <a:solidFill>
-            <a:srgbClr val="0A1F33"/>
-          </a:solidFill>
-          <a:ln>
-            <a:noFill/>
-          </a:ln>
-          <a:effectLst/>
-        </p:spPr>
-        <p:style>
-          <a:lnRef idx="1">
-            <a:schemeClr val="accent1"/>
-          </a:lnRef>
-          <a:fillRef idx="3">
-            <a:schemeClr val="accent1"/>
-          </a:fillRef>
-          <a:effectRef idx="2">
-            <a:schemeClr val="accent1"/>
-          </a:effectRef>
-          <a:fontRef idx="minor">
-            <a:schemeClr val="lt1"/>
-          </a:fontRef>
-        </p:style>
-        <p:txBody>
-          <a:bodyPr rtlCol="0" anchor="ctr"/>
-          <a:lstStyle/>
-          <a:p>
-            <a:pPr algn="ctr"/>
-          </a:p>
-        </p:txBody>
-      </p:sp>
-      <p:sp>
-        <p:nvSpPr>
-          <p:cNvPr id="4" name="Oval 3"/>
-          <p:cNvSpPr/>
-          <p:nvPr/>
-        </p:nvSpPr>
-        <p:spPr>
-          <a:xfrm>
-            <a:off x="5175504" y="822960"/>
-            <a:ext cx="1828800" cy="1828800"/>
+            <a:off x="548640" y="502920"/>
+            <a:ext cx="502920" cy="502920"/>
           </a:xfrm>
           <a:prstGeom prst="ellipse">
             <a:avLst/>
@@ -4354,14 +7784,14 @@
       </p:sp>
       <p:sp>
         <p:nvSpPr>
-          <p:cNvPr id="5" name="TextBox 4"/>
+          <p:cNvPr id="3" name="TextBox 2"/>
           <p:cNvSpPr txBox="1"/>
           <p:nvPr/>
         </p:nvSpPr>
         <p:spPr>
           <a:xfrm>
-            <a:off x="5175504" y="822960"/>
-            <a:ext cx="1828800" cy="1828800"/>
+            <a:off x="548640" y="502920"/>
+            <a:ext cx="502920" cy="502920"/>
           </a:xfrm>
           <a:prstGeom prst="rect">
             <a:avLst/>
@@ -4376,27 +7806,27 @@
           <a:p>
             <a:pPr algn="ctr"/>
             <a:r>
-              <a:rPr sz="4400" b="1">
+              <a:rPr sz="2000" b="0">
                 <a:solidFill>
                   <a:srgbClr val="0A1F33"/>
                 </a:solidFill>
                 <a:latin typeface="Calibri"/>
               </a:rPr>
-              <a:t>✔</a:t>
-            </a:r>
-          </a:p>
-        </p:txBody>
-      </p:sp>
-      <p:sp>
-        <p:nvSpPr>
-          <p:cNvPr id="6" name="TextBox 5"/>
+              <a:t>⚖</a:t>
+            </a:r>
+          </a:p>
+        </p:txBody>
+      </p:sp>
+      <p:sp>
+        <p:nvSpPr>
+          <p:cNvPr id="4" name="TextBox 3"/>
           <p:cNvSpPr txBox="1"/>
           <p:nvPr/>
         </p:nvSpPr>
         <p:spPr>
           <a:xfrm>
-            <a:off x="548640" y="2880360"/>
-            <a:ext cx="11064240" cy="457200"/>
+            <a:off x="1234440" y="530352"/>
+            <a:ext cx="9144000" cy="457200"/>
           </a:xfrm>
           <a:prstGeom prst="rect">
             <a:avLst/>
@@ -4409,29 +7839,28 @@
           </a:bodyPr>
           <a:lstStyle/>
           <a:p>
-            <a:pPr algn="ctr"/>
             <a:r>
               <a:rPr sz="1400" b="1">
                 <a:solidFill>
-                  <a:srgbClr val="F0B429"/>
+                  <a:srgbClr val="DE911D"/>
                 </a:solidFill>
                 <a:latin typeface="Calibri"/>
               </a:rPr>
-              <a:t>PRÁCTICA — CÁLCULO DE DESEMPATES DE UN TORNEO SIMULADO</a:t>
-            </a:r>
-          </a:p>
-        </p:txBody>
-      </p:sp>
-      <p:sp>
-        <p:nvSpPr>
-          <p:cNvPr id="7" name="TextBox 6"/>
+              <a:t>CONTENIDO PARA VER EN CLASE</a:t>
+            </a:r>
+          </a:p>
+        </p:txBody>
+      </p:sp>
+      <p:sp>
+        <p:nvSpPr>
+          <p:cNvPr id="5" name="TextBox 4"/>
           <p:cNvSpPr txBox="1"/>
           <p:nvPr/>
         </p:nvSpPr>
         <p:spPr>
           <a:xfrm>
-            <a:off x="1280160" y="3383280"/>
-            <a:ext cx="9601200" cy="2377440"/>
+            <a:off x="548640" y="1051560"/>
+            <a:ext cx="11064240" cy="822960"/>
           </a:xfrm>
           <a:prstGeom prst="rect">
             <a:avLst/>
@@ -4444,29 +7873,72 @@
           </a:bodyPr>
           <a:lstStyle/>
           <a:p>
+            <a:r>
+              <a:rPr sz="2600" b="1">
+                <a:solidFill>
+                  <a:srgbClr val="0A1F33"/>
+                </a:solidFill>
+                <a:latin typeface="Cambria"/>
+              </a:rPr>
+              <a:t>Rápidas y relámpago en la práctica</a:t>
+            </a:r>
+          </a:p>
+        </p:txBody>
+      </p:sp>
+      <p:sp>
+        <p:nvSpPr>
+          <p:cNvPr id="6" name="Rectangle 5"/>
+          <p:cNvSpPr/>
+          <p:nvPr/>
+        </p:nvSpPr>
+        <p:spPr>
+          <a:xfrm>
+            <a:off x="548640" y="1874519"/>
+            <a:ext cx="11064240" cy="4389120"/>
+          </a:xfrm>
+          <a:prstGeom prst="rect">
+            <a:avLst/>
+          </a:prstGeom>
+          <a:solidFill>
+            <a:srgbClr val="F0F4F8"/>
+          </a:solidFill>
+          <a:ln>
+            <a:noFill/>
+          </a:ln>
+          <a:effectLst/>
+        </p:spPr>
+        <p:style>
+          <a:lnRef idx="1">
+            <a:schemeClr val="accent1"/>
+          </a:lnRef>
+          <a:fillRef idx="3">
+            <a:schemeClr val="accent1"/>
+          </a:fillRef>
+          <a:effectRef idx="2">
+            <a:schemeClr val="accent1"/>
+          </a:effectRef>
+          <a:fontRef idx="minor">
+            <a:schemeClr val="lt1"/>
+          </a:fontRef>
+        </p:style>
+        <p:txBody>
+          <a:bodyPr rtlCol="0" anchor="ctr"/>
+          <a:lstStyle/>
+          <a:p>
             <a:pPr algn="ctr"/>
-            <a:r>
-              <a:rPr sz="2000" b="0">
-                <a:solidFill>
-                  <a:srgbClr val="FFFFFF"/>
-                </a:solidFill>
-                <a:latin typeface="Cambria"/>
-              </a:rPr>
-              <a:t>Con los resultados de un torneo simulado de 8 jugadores, cada participante calcula la tabla final aplicando Buchholz y Sonneborn-Berger.</a:t>
-            </a:r>
-          </a:p>
-        </p:txBody>
-      </p:sp>
-      <p:sp>
-        <p:nvSpPr>
-          <p:cNvPr id="8" name="TextBox 7"/>
+          </a:p>
+        </p:txBody>
+      </p:sp>
+      <p:sp>
+        <p:nvSpPr>
+          <p:cNvPr id="7" name="TextBox 6"/>
           <p:cNvSpPr txBox="1"/>
           <p:nvPr/>
         </p:nvSpPr>
         <p:spPr>
           <a:xfrm>
-            <a:off x="548640" y="6263640"/>
-            <a:ext cx="11064240" cy="365760"/>
+            <a:off x="914400" y="2011680"/>
+            <a:ext cx="10332720" cy="1371600"/>
           </a:xfrm>
           <a:prstGeom prst="rect">
             <a:avLst/>
@@ -4479,15 +7951,1486 @@
           </a:bodyPr>
           <a:lstStyle/>
           <a:p>
+            <a:r>
+              <a:rPr sz="1500" b="0">
+                <a:solidFill>
+                  <a:srgbClr val="0A1F33"/>
+                </a:solidFill>
+                <a:latin typeface="Calibri"/>
+              </a:rPr>
+              <a:t>En estos ritmos no es obligatorio anotar, salvo que el reglamento del evento lo exija; aun así, el jugador conserva sus reclamos. Las sanciones de tiempo de los art. 7 y 9 son de un minuto en lugar de dos.</a:t>
+            </a:r>
+          </a:p>
+        </p:txBody>
+      </p:sp>
+      <p:sp>
+        <p:nvSpPr>
+          <p:cNvPr id="8" name="TextBox 7"/>
+          <p:cNvSpPr txBox="1"/>
+          <p:nvPr/>
+        </p:nvSpPr>
+        <p:spPr>
+          <a:xfrm>
+            <a:off x="914400" y="3429000"/>
+            <a:ext cx="10332720" cy="2743200"/>
+          </a:xfrm>
+          <a:prstGeom prst="rect">
+            <a:avLst/>
+          </a:prstGeom>
+          <a:noFill/>
+        </p:spPr>
+        <p:txBody>
+          <a:bodyPr wrap="square">
+            <a:spAutoFit/>
+          </a:bodyPr>
+          <a:lstStyle/>
+          <a:p>
+            <a:pPr>
+              <a:spcAft>
+                <a:spcPts val="800"/>
+              </a:spcAft>
+            </a:pPr>
+            <a:r>
+              <a:rPr sz="1300">
+                <a:solidFill>
+                  <a:srgbClr val="334E68"/>
+                </a:solidFill>
+                <a:latin typeface="Calibri"/>
+              </a:rPr>
+              <a:t>•  Supervisión adecuada: un árbitro para pocas partidas, que puede ver cada mesa y registrar las partidas. Con ella rigen casi las mismas reglas que en ritmo clásico.</a:t>
+            </a:r>
+          </a:p>
+          <a:p>
+            <a:pPr>
+              <a:spcAft>
+                <a:spcPts val="800"/>
+              </a:spcAft>
+            </a:pPr>
+            <a:r>
+              <a:rPr sz="1300">
+                <a:solidFill>
+                  <a:srgbClr val="334E68"/>
+                </a:solidFill>
+                <a:latin typeface="Calibri"/>
+              </a:rPr>
+              <a:t>•  Sin supervisión adecuada, pasadas 10 jugadas de cada bando ya no se admiten reclamos por el tablero mal armado u orientado.</a:t>
+            </a:r>
+          </a:p>
+          <a:p>
+            <a:pPr>
+              <a:spcAft>
+                <a:spcPts val="800"/>
+              </a:spcAft>
+            </a:pPr>
+            <a:r>
+              <a:rPr sz="1300">
+                <a:solidFill>
+                  <a:srgbClr val="334E68"/>
+                </a:solidFill>
+                <a:latin typeface="Calibri"/>
+              </a:rPr>
+              <a:t>•  En relámpago sin supervisión, la caída de bandera la reclama el jugador deteniendo el reloj, siempre que su propio tiempo no se haya agotado.</a:t>
+            </a:r>
+          </a:p>
+          <a:p>
+            <a:pPr>
+              <a:spcAft>
+                <a:spcPts val="800"/>
+              </a:spcAft>
+            </a:pPr>
+            <a:r>
+              <a:rPr sz="1300">
+                <a:solidFill>
+                  <a:srgbClr val="334E68"/>
+                </a:solidFill>
+                <a:latin typeface="Calibri"/>
+              </a:rPr>
+              <a:t>•  El mate termina la partida al instante: si un jugador da mate y un instante después cae su bandera, gana quien dio mate.</a:t>
+            </a:r>
+          </a:p>
+        </p:txBody>
+      </p:sp>
+      <p:sp>
+        <p:nvSpPr>
+          <p:cNvPr id="9" name="TextBox 8"/>
+          <p:cNvSpPr txBox="1"/>
+          <p:nvPr/>
+        </p:nvSpPr>
+        <p:spPr>
+          <a:xfrm>
+            <a:off x="548640" y="6355080"/>
+            <a:ext cx="11064240" cy="365760"/>
+          </a:xfrm>
+          <a:prstGeom prst="rect">
+            <a:avLst/>
+          </a:prstGeom>
+          <a:noFill/>
+        </p:spPr>
+        <p:txBody>
+          <a:bodyPr wrap="square">
+            <a:spAutoFit/>
+          </a:bodyPr>
+          <a:lstStyle/>
+          <a:p>
+            <a:r>
+              <a:rPr sz="1100" b="0">
+                <a:solidFill>
+                  <a:srgbClr val="627D98"/>
+                </a:solidFill>
+                <a:latin typeface="Calibri"/>
+              </a:rPr>
+              <a:t>Fuente: Leyes del Ajedrez 2023 (Handbook E.I.01), apéndices A.2 a A.5 y B.3</a:t>
+            </a:r>
+          </a:p>
+        </p:txBody>
+      </p:sp>
+    </p:spTree>
+  </p:cSld>
+  <p:clrMapOvr>
+    <a:masterClrMapping/>
+  </p:clrMapOvr>
+</p:sld>
+</file>
+
+<file path=ppt/slides/slide6.xml><?xml version="1.0" encoding="utf-8"?>
+<p:sld xmlns:a="http://schemas.openxmlformats.org/drawingml/2006/main" xmlns:p="http://schemas.openxmlformats.org/presentationml/2006/main" xmlns:r="http://schemas.openxmlformats.org/officeDocument/2006/relationships">
+  <p:cSld>
+    <p:spTree>
+      <p:nvGrpSpPr>
+        <p:cNvPr id="1" name=""/>
+        <p:cNvGrpSpPr/>
+        <p:nvPr/>
+      </p:nvGrpSpPr>
+      <p:grpSpPr/>
+      <p:sp>
+        <p:nvSpPr>
+          <p:cNvPr id="2" name="Oval 1"/>
+          <p:cNvSpPr/>
+          <p:nvPr/>
+        </p:nvSpPr>
+        <p:spPr>
+          <a:xfrm>
+            <a:off x="548640" y="502920"/>
+            <a:ext cx="502920" cy="502920"/>
+          </a:xfrm>
+          <a:prstGeom prst="ellipse">
+            <a:avLst/>
+          </a:prstGeom>
+          <a:solidFill>
+            <a:srgbClr val="DE911D"/>
+          </a:solidFill>
+          <a:ln>
+            <a:noFill/>
+          </a:ln>
+          <a:effectLst/>
+        </p:spPr>
+        <p:style>
+          <a:lnRef idx="1">
+            <a:schemeClr val="accent1"/>
+          </a:lnRef>
+          <a:fillRef idx="3">
+            <a:schemeClr val="accent1"/>
+          </a:fillRef>
+          <a:effectRef idx="2">
+            <a:schemeClr val="accent1"/>
+          </a:effectRef>
+          <a:fontRef idx="minor">
+            <a:schemeClr val="lt1"/>
+          </a:fontRef>
+        </p:style>
+        <p:txBody>
+          <a:bodyPr rtlCol="0" anchor="ctr"/>
+          <a:lstStyle/>
+          <a:p>
             <a:pPr algn="ctr"/>
-            <a:r>
-              <a:rPr sz="1200" b="0">
-                <a:solidFill>
-                  <a:srgbClr val="9FB3C8"/>
+          </a:p>
+        </p:txBody>
+      </p:sp>
+      <p:sp>
+        <p:nvSpPr>
+          <p:cNvPr id="3" name="TextBox 2"/>
+          <p:cNvSpPr txBox="1"/>
+          <p:nvPr/>
+        </p:nvSpPr>
+        <p:spPr>
+          <a:xfrm>
+            <a:off x="548640" y="502920"/>
+            <a:ext cx="502920" cy="502920"/>
+          </a:xfrm>
+          <a:prstGeom prst="rect">
+            <a:avLst/>
+          </a:prstGeom>
+          <a:noFill/>
+        </p:spPr>
+        <p:txBody>
+          <a:bodyPr wrap="square">
+            <a:spAutoFit/>
+          </a:bodyPr>
+          <a:lstStyle/>
+          <a:p>
+            <a:pPr algn="ctr"/>
+            <a:r>
+              <a:rPr sz="2000" b="0">
+                <a:solidFill>
+                  <a:srgbClr val="0A1F33"/>
                 </a:solidFill>
                 <a:latin typeface="Calibri"/>
               </a:rPr>
-              <a:t>Formación Ajedrez · Sesión 3</a:t>
+              <a:t>⚖</a:t>
+            </a:r>
+          </a:p>
+        </p:txBody>
+      </p:sp>
+      <p:sp>
+        <p:nvSpPr>
+          <p:cNvPr id="4" name="TextBox 3"/>
+          <p:cNvSpPr txBox="1"/>
+          <p:nvPr/>
+        </p:nvSpPr>
+        <p:spPr>
+          <a:xfrm>
+            <a:off x="1234440" y="530352"/>
+            <a:ext cx="9144000" cy="457200"/>
+          </a:xfrm>
+          <a:prstGeom prst="rect">
+            <a:avLst/>
+          </a:prstGeom>
+          <a:noFill/>
+        </p:spPr>
+        <p:txBody>
+          <a:bodyPr wrap="square">
+            <a:spAutoFit/>
+          </a:bodyPr>
+          <a:lstStyle/>
+          <a:p>
+            <a:r>
+              <a:rPr sz="1400" b="1">
+                <a:solidFill>
+                  <a:srgbClr val="DE911D"/>
+                </a:solidFill>
+                <a:latin typeface="Calibri"/>
+              </a:rPr>
+              <a:t>CONTENIDO PARA VER EN CLASE</a:t>
+            </a:r>
+          </a:p>
+        </p:txBody>
+      </p:sp>
+      <p:sp>
+        <p:nvSpPr>
+          <p:cNvPr id="5" name="TextBox 4"/>
+          <p:cNvSpPr txBox="1"/>
+          <p:nvPr/>
+        </p:nvSpPr>
+        <p:spPr>
+          <a:xfrm>
+            <a:off x="548640" y="1051560"/>
+            <a:ext cx="11064240" cy="822960"/>
+          </a:xfrm>
+          <a:prstGeom prst="rect">
+            <a:avLst/>
+          </a:prstGeom>
+          <a:noFill/>
+        </p:spPr>
+        <p:txBody>
+          <a:bodyPr wrap="square">
+            <a:spAutoFit/>
+          </a:bodyPr>
+          <a:lstStyle/>
+          <a:p>
+            <a:r>
+              <a:rPr sz="2600" b="1">
+                <a:solidFill>
+                  <a:srgbClr val="0A1F33"/>
+                </a:solidFill>
+                <a:latin typeface="Cambria"/>
+              </a:rPr>
+              <a:t>Buchholz y sus cortes</a:t>
+            </a:r>
+          </a:p>
+        </p:txBody>
+      </p:sp>
+      <p:sp>
+        <p:nvSpPr>
+          <p:cNvPr id="6" name="Rectangle 5"/>
+          <p:cNvSpPr/>
+          <p:nvPr/>
+        </p:nvSpPr>
+        <p:spPr>
+          <a:xfrm>
+            <a:off x="548640" y="1874519"/>
+            <a:ext cx="11064240" cy="4389120"/>
+          </a:xfrm>
+          <a:prstGeom prst="rect">
+            <a:avLst/>
+          </a:prstGeom>
+          <a:solidFill>
+            <a:srgbClr val="F0F4F8"/>
+          </a:solidFill>
+          <a:ln>
+            <a:noFill/>
+          </a:ln>
+          <a:effectLst/>
+        </p:spPr>
+        <p:style>
+          <a:lnRef idx="1">
+            <a:schemeClr val="accent1"/>
+          </a:lnRef>
+          <a:fillRef idx="3">
+            <a:schemeClr val="accent1"/>
+          </a:fillRef>
+          <a:effectRef idx="2">
+            <a:schemeClr val="accent1"/>
+          </a:effectRef>
+          <a:fontRef idx="minor">
+            <a:schemeClr val="lt1"/>
+          </a:fontRef>
+        </p:style>
+        <p:txBody>
+          <a:bodyPr rtlCol="0" anchor="ctr"/>
+          <a:lstStyle/>
+          <a:p>
+            <a:pPr algn="ctr"/>
+          </a:p>
+        </p:txBody>
+      </p:sp>
+      <p:sp>
+        <p:nvSpPr>
+          <p:cNvPr id="7" name="TextBox 6"/>
+          <p:cNvSpPr txBox="1"/>
+          <p:nvPr/>
+        </p:nvSpPr>
+        <p:spPr>
+          <a:xfrm>
+            <a:off x="914400" y="2011680"/>
+            <a:ext cx="10332720" cy="1371600"/>
+          </a:xfrm>
+          <a:prstGeom prst="rect">
+            <a:avLst/>
+          </a:prstGeom>
+          <a:noFill/>
+        </p:spPr>
+        <p:txBody>
+          <a:bodyPr wrap="square">
+            <a:spAutoFit/>
+          </a:bodyPr>
+          <a:lstStyle/>
+          <a:p>
+            <a:r>
+              <a:rPr sz="1500" b="0">
+                <a:solidFill>
+                  <a:srgbClr val="0A1F33"/>
+                </a:solidFill>
+                <a:latin typeface="Calibri"/>
+              </a:rPr>
+              <a:t>El Buchholz suma los puntos finales de todos los rivales que enfrentó el jugador: mide la dureza de su recorrido. Es el desempate más usado en el sistema suizo. El Buchholz con corte 1 quita el resultado más bajo de esa suma, para que un rival que se hundió pese menos.</a:t>
+            </a:r>
+          </a:p>
+        </p:txBody>
+      </p:sp>
+      <p:sp>
+        <p:nvSpPr>
+          <p:cNvPr id="8" name="TextBox 7"/>
+          <p:cNvSpPr txBox="1"/>
+          <p:nvPr/>
+        </p:nvSpPr>
+        <p:spPr>
+          <a:xfrm>
+            <a:off x="914400" y="3429000"/>
+            <a:ext cx="10332720" cy="2743200"/>
+          </a:xfrm>
+          <a:prstGeom prst="rect">
+            <a:avLst/>
+          </a:prstGeom>
+          <a:noFill/>
+        </p:spPr>
+        <p:txBody>
+          <a:bodyPr wrap="square">
+            <a:spAutoFit/>
+          </a:bodyPr>
+          <a:lstStyle/>
+          <a:p>
+            <a:pPr>
+              <a:spcAft>
+                <a:spcPts val="800"/>
+              </a:spcAft>
+            </a:pPr>
+            <a:r>
+              <a:rPr sz="1500">
+                <a:solidFill>
+                  <a:srgbClr val="334E68"/>
+                </a:solidFill>
+                <a:latin typeface="Calibri"/>
+              </a:rPr>
+              <a:t>•  Ejemplo: los rivales de Ana terminaron con 3, 2½, 4, 1 y 2 puntos. Buchholz = 12½; con corte 1 (se quita el 1) = 11½.</a:t>
+            </a:r>
+          </a:p>
+          <a:p>
+            <a:pPr>
+              <a:spcAft>
+                <a:spcPts val="800"/>
+              </a:spcAft>
+            </a:pPr>
+            <a:r>
+              <a:rPr sz="1500">
+                <a:solidFill>
+                  <a:srgbClr val="334E68"/>
+                </a:solidFill>
+                <a:latin typeface="Calibri"/>
+              </a:rPr>
+              <a:t>•  Los rivales de Bruno terminaron con 3½, 3, 2, 2 y 2 puntos. Buchholz = 12½; con corte 1 (se quita un 2) = 10½.</a:t>
+            </a:r>
+          </a:p>
+          <a:p>
+            <a:pPr>
+              <a:spcAft>
+                <a:spcPts val="800"/>
+              </a:spcAft>
+            </a:pPr>
+            <a:r>
+              <a:rPr sz="1500">
+                <a:solidFill>
+                  <a:srgbClr val="334E68"/>
+                </a:solidFill>
+                <a:latin typeface="Calibri"/>
+              </a:rPr>
+              <a:t>•  Empatan en Buchholz, pero el corte 1 ordena primero a Ana.</a:t>
+            </a:r>
+          </a:p>
+          <a:p>
+            <a:pPr>
+              <a:spcAft>
+                <a:spcPts val="800"/>
+              </a:spcAft>
+            </a:pPr>
+            <a:r>
+              <a:rPr sz="1500">
+                <a:solidFill>
+                  <a:srgbClr val="334E68"/>
+                </a:solidFill>
+                <a:latin typeface="Calibri"/>
+              </a:rPr>
+              <a:t>•  El reglamento del torneo anuncia de antemano la lista de desempates y su orden.</a:t>
+            </a:r>
+          </a:p>
+        </p:txBody>
+      </p:sp>
+      <p:sp>
+        <p:nvSpPr>
+          <p:cNvPr id="9" name="TextBox 8"/>
+          <p:cNvSpPr txBox="1"/>
+          <p:nvPr/>
+        </p:nvSpPr>
+        <p:spPr>
+          <a:xfrm>
+            <a:off x="548640" y="6355080"/>
+            <a:ext cx="11064240" cy="365760"/>
+          </a:xfrm>
+          <a:prstGeom prst="rect">
+            <a:avLst/>
+          </a:prstGeom>
+          <a:noFill/>
+        </p:spPr>
+        <p:txBody>
+          <a:bodyPr wrap="square">
+            <a:spAutoFit/>
+          </a:bodyPr>
+          <a:lstStyle/>
+          <a:p>
+            <a:r>
+              <a:rPr sz="1100" b="0">
+                <a:solidFill>
+                  <a:srgbClr val="627D98"/>
+                </a:solidFill>
+                <a:latin typeface="Calibri"/>
+              </a:rPr>
+              <a:t>Fuente: Reglamento de desempates de la FIDE (Handbook C.07)</a:t>
+            </a:r>
+          </a:p>
+        </p:txBody>
+      </p:sp>
+    </p:spTree>
+  </p:cSld>
+  <p:clrMapOvr>
+    <a:masterClrMapping/>
+  </p:clrMapOvr>
+</p:sld>
+</file>
+
+<file path=ppt/slides/slide7.xml><?xml version="1.0" encoding="utf-8"?>
+<p:sld xmlns:a="http://schemas.openxmlformats.org/drawingml/2006/main" xmlns:p="http://schemas.openxmlformats.org/presentationml/2006/main" xmlns:r="http://schemas.openxmlformats.org/officeDocument/2006/relationships">
+  <p:cSld>
+    <p:spTree>
+      <p:nvGrpSpPr>
+        <p:cNvPr id="1" name=""/>
+        <p:cNvGrpSpPr/>
+        <p:nvPr/>
+      </p:nvGrpSpPr>
+      <p:grpSpPr/>
+      <p:sp>
+        <p:nvSpPr>
+          <p:cNvPr id="2" name="Oval 1"/>
+          <p:cNvSpPr/>
+          <p:nvPr/>
+        </p:nvSpPr>
+        <p:spPr>
+          <a:xfrm>
+            <a:off x="548640" y="502920"/>
+            <a:ext cx="502920" cy="502920"/>
+          </a:xfrm>
+          <a:prstGeom prst="ellipse">
+            <a:avLst/>
+          </a:prstGeom>
+          <a:solidFill>
+            <a:srgbClr val="DE911D"/>
+          </a:solidFill>
+          <a:ln>
+            <a:noFill/>
+          </a:ln>
+          <a:effectLst/>
+        </p:spPr>
+        <p:style>
+          <a:lnRef idx="1">
+            <a:schemeClr val="accent1"/>
+          </a:lnRef>
+          <a:fillRef idx="3">
+            <a:schemeClr val="accent1"/>
+          </a:fillRef>
+          <a:effectRef idx="2">
+            <a:schemeClr val="accent1"/>
+          </a:effectRef>
+          <a:fontRef idx="minor">
+            <a:schemeClr val="lt1"/>
+          </a:fontRef>
+        </p:style>
+        <p:txBody>
+          <a:bodyPr rtlCol="0" anchor="ctr"/>
+          <a:lstStyle/>
+          <a:p>
+            <a:pPr algn="ctr"/>
+          </a:p>
+        </p:txBody>
+      </p:sp>
+      <p:sp>
+        <p:nvSpPr>
+          <p:cNvPr id="3" name="TextBox 2"/>
+          <p:cNvSpPr txBox="1"/>
+          <p:nvPr/>
+        </p:nvSpPr>
+        <p:spPr>
+          <a:xfrm>
+            <a:off x="548640" y="502920"/>
+            <a:ext cx="502920" cy="502920"/>
+          </a:xfrm>
+          <a:prstGeom prst="rect">
+            <a:avLst/>
+          </a:prstGeom>
+          <a:noFill/>
+        </p:spPr>
+        <p:txBody>
+          <a:bodyPr wrap="square">
+            <a:spAutoFit/>
+          </a:bodyPr>
+          <a:lstStyle/>
+          <a:p>
+            <a:pPr algn="ctr"/>
+            <a:r>
+              <a:rPr sz="2000" b="0">
+                <a:solidFill>
+                  <a:srgbClr val="0A1F33"/>
+                </a:solidFill>
+                <a:latin typeface="Calibri"/>
+              </a:rPr>
+              <a:t>⚖</a:t>
+            </a:r>
+          </a:p>
+        </p:txBody>
+      </p:sp>
+      <p:sp>
+        <p:nvSpPr>
+          <p:cNvPr id="4" name="TextBox 3"/>
+          <p:cNvSpPr txBox="1"/>
+          <p:nvPr/>
+        </p:nvSpPr>
+        <p:spPr>
+          <a:xfrm>
+            <a:off x="1234440" y="530352"/>
+            <a:ext cx="9144000" cy="457200"/>
+          </a:xfrm>
+          <a:prstGeom prst="rect">
+            <a:avLst/>
+          </a:prstGeom>
+          <a:noFill/>
+        </p:spPr>
+        <p:txBody>
+          <a:bodyPr wrap="square">
+            <a:spAutoFit/>
+          </a:bodyPr>
+          <a:lstStyle/>
+          <a:p>
+            <a:r>
+              <a:rPr sz="1400" b="1">
+                <a:solidFill>
+                  <a:srgbClr val="DE911D"/>
+                </a:solidFill>
+                <a:latin typeface="Calibri"/>
+              </a:rPr>
+              <a:t>CONTENIDO PARA VER EN CLASE</a:t>
+            </a:r>
+          </a:p>
+        </p:txBody>
+      </p:sp>
+      <p:sp>
+        <p:nvSpPr>
+          <p:cNvPr id="5" name="TextBox 4"/>
+          <p:cNvSpPr txBox="1"/>
+          <p:nvPr/>
+        </p:nvSpPr>
+        <p:spPr>
+          <a:xfrm>
+            <a:off x="548640" y="1051560"/>
+            <a:ext cx="11064240" cy="822960"/>
+          </a:xfrm>
+          <a:prstGeom prst="rect">
+            <a:avLst/>
+          </a:prstGeom>
+          <a:noFill/>
+        </p:spPr>
+        <p:txBody>
+          <a:bodyPr wrap="square">
+            <a:spAutoFit/>
+          </a:bodyPr>
+          <a:lstStyle/>
+          <a:p>
+            <a:r>
+              <a:rPr sz="2600" b="1">
+                <a:solidFill>
+                  <a:srgbClr val="0A1F33"/>
+                </a:solidFill>
+                <a:latin typeface="Cambria"/>
+              </a:rPr>
+              <a:t>Sonneborn-Berger y encuentro directo</a:t>
+            </a:r>
+          </a:p>
+        </p:txBody>
+      </p:sp>
+      <p:sp>
+        <p:nvSpPr>
+          <p:cNvPr id="6" name="Rectangle 5"/>
+          <p:cNvSpPr/>
+          <p:nvPr/>
+        </p:nvSpPr>
+        <p:spPr>
+          <a:xfrm>
+            <a:off x="548640" y="1874519"/>
+            <a:ext cx="11064240" cy="4389120"/>
+          </a:xfrm>
+          <a:prstGeom prst="rect">
+            <a:avLst/>
+          </a:prstGeom>
+          <a:solidFill>
+            <a:srgbClr val="F0F4F8"/>
+          </a:solidFill>
+          <a:ln>
+            <a:noFill/>
+          </a:ln>
+          <a:effectLst/>
+        </p:spPr>
+        <p:style>
+          <a:lnRef idx="1">
+            <a:schemeClr val="accent1"/>
+          </a:lnRef>
+          <a:fillRef idx="3">
+            <a:schemeClr val="accent1"/>
+          </a:fillRef>
+          <a:effectRef idx="2">
+            <a:schemeClr val="accent1"/>
+          </a:effectRef>
+          <a:fontRef idx="minor">
+            <a:schemeClr val="lt1"/>
+          </a:fontRef>
+        </p:style>
+        <p:txBody>
+          <a:bodyPr rtlCol="0" anchor="ctr"/>
+          <a:lstStyle/>
+          <a:p>
+            <a:pPr algn="ctr"/>
+          </a:p>
+        </p:txBody>
+      </p:sp>
+      <p:sp>
+        <p:nvSpPr>
+          <p:cNvPr id="7" name="TextBox 6"/>
+          <p:cNvSpPr txBox="1"/>
+          <p:nvPr/>
+        </p:nvSpPr>
+        <p:spPr>
+          <a:xfrm>
+            <a:off x="914400" y="2011680"/>
+            <a:ext cx="10332720" cy="1371600"/>
+          </a:xfrm>
+          <a:prstGeom prst="rect">
+            <a:avLst/>
+          </a:prstGeom>
+          <a:noFill/>
+        </p:spPr>
+        <p:txBody>
+          <a:bodyPr wrap="square">
+            <a:spAutoFit/>
+          </a:bodyPr>
+          <a:lstStyle/>
+          <a:p>
+            <a:r>
+              <a:rPr sz="1300" b="0">
+                <a:solidFill>
+                  <a:srgbClr val="0A1F33"/>
+                </a:solidFill>
+                <a:latin typeface="Calibri"/>
+              </a:rPr>
+              <a:t>El Sonneborn-Berger suma los puntos finales de los rivales a los que el jugador venció, más la mitad de los puntos de aquellos con quienes empató. Premia haberles ganado a los que terminaron arriba y es el desempate habitual en el sistema de todos contra todos. El encuentro directo ordena a los empatados según el resultado de sus partidas entre sí.</a:t>
+            </a:r>
+          </a:p>
+        </p:txBody>
+      </p:sp>
+      <p:sp>
+        <p:nvSpPr>
+          <p:cNvPr id="8" name="TextBox 7"/>
+          <p:cNvSpPr txBox="1"/>
+          <p:nvPr/>
+        </p:nvSpPr>
+        <p:spPr>
+          <a:xfrm>
+            <a:off x="914400" y="3429000"/>
+            <a:ext cx="10332720" cy="2743200"/>
+          </a:xfrm>
+          <a:prstGeom prst="rect">
+            <a:avLst/>
+          </a:prstGeom>
+          <a:noFill/>
+        </p:spPr>
+        <p:txBody>
+          <a:bodyPr wrap="square">
+            <a:spAutoFit/>
+          </a:bodyPr>
+          <a:lstStyle/>
+          <a:p>
+            <a:pPr>
+              <a:spcAft>
+                <a:spcPts val="800"/>
+              </a:spcAft>
+            </a:pPr>
+            <a:r>
+              <a:rPr sz="1500">
+                <a:solidFill>
+                  <a:srgbClr val="334E68"/>
+                </a:solidFill>
+                <a:latin typeface="Calibri"/>
+              </a:rPr>
+              <a:t>•  Si los empatados no se enfrentaron o el encuentro no define nada, se pasa al siguiente desempate de la lista.</a:t>
+            </a:r>
+          </a:p>
+          <a:p>
+            <a:pPr>
+              <a:spcAft>
+                <a:spcPts val="800"/>
+              </a:spcAft>
+            </a:pPr>
+            <a:r>
+              <a:rPr sz="1500">
+                <a:solidFill>
+                  <a:srgbClr val="334E68"/>
+                </a:solidFill>
+                <a:latin typeface="Calibri"/>
+              </a:rPr>
+              <a:t>•  Si se agota la lista y sigue el empate, se resuelve por sorteo, salvo que el reglamento diga otra cosa.</a:t>
+            </a:r>
+          </a:p>
+          <a:p>
+            <a:pPr>
+              <a:spcAft>
+                <a:spcPts val="800"/>
+              </a:spcAft>
+            </a:pPr>
+            <a:r>
+              <a:rPr sz="1500">
+                <a:solidFill>
+                  <a:srgbClr val="334E68"/>
+                </a:solidFill>
+                <a:latin typeface="Calibri"/>
+              </a:rPr>
+              <a:t>•  Si el reglamento no dice nada sobre cómo ordenar a los empatados, se usan desempates fuera del tablero, no una partida extra.</a:t>
+            </a:r>
+          </a:p>
+        </p:txBody>
+      </p:sp>
+      <p:sp>
+        <p:nvSpPr>
+          <p:cNvPr id="9" name="TextBox 8"/>
+          <p:cNvSpPr txBox="1"/>
+          <p:nvPr/>
+        </p:nvSpPr>
+        <p:spPr>
+          <a:xfrm>
+            <a:off x="548640" y="6355080"/>
+            <a:ext cx="11064240" cy="365760"/>
+          </a:xfrm>
+          <a:prstGeom prst="rect">
+            <a:avLst/>
+          </a:prstGeom>
+          <a:noFill/>
+        </p:spPr>
+        <p:txBody>
+          <a:bodyPr wrap="square">
+            <a:spAutoFit/>
+          </a:bodyPr>
+          <a:lstStyle/>
+          <a:p>
+            <a:r>
+              <a:rPr sz="1100" b="0">
+                <a:solidFill>
+                  <a:srgbClr val="627D98"/>
+                </a:solidFill>
+                <a:latin typeface="Calibri"/>
+              </a:rPr>
+              <a:t>Fuente: Reglamento de desempates de la FIDE (Handbook C.07)</a:t>
+            </a:r>
+          </a:p>
+        </p:txBody>
+      </p:sp>
+    </p:spTree>
+  </p:cSld>
+  <p:clrMapOvr>
+    <a:masterClrMapping/>
+  </p:clrMapOvr>
+</p:sld>
+</file>
+
+<file path=ppt/slides/slide8.xml><?xml version="1.0" encoding="utf-8"?>
+<p:sld xmlns:a="http://schemas.openxmlformats.org/drawingml/2006/main" xmlns:p="http://schemas.openxmlformats.org/presentationml/2006/main" xmlns:r="http://schemas.openxmlformats.org/officeDocument/2006/relationships">
+  <p:cSld>
+    <p:spTree>
+      <p:nvGrpSpPr>
+        <p:cNvPr id="1" name=""/>
+        <p:cNvGrpSpPr/>
+        <p:nvPr/>
+      </p:nvGrpSpPr>
+      <p:grpSpPr/>
+      <p:sp>
+        <p:nvSpPr>
+          <p:cNvPr id="2" name="Oval 1"/>
+          <p:cNvSpPr/>
+          <p:nvPr/>
+        </p:nvSpPr>
+        <p:spPr>
+          <a:xfrm>
+            <a:off x="548640" y="502920"/>
+            <a:ext cx="502920" cy="502920"/>
+          </a:xfrm>
+          <a:prstGeom prst="ellipse">
+            <a:avLst/>
+          </a:prstGeom>
+          <a:solidFill>
+            <a:srgbClr val="DE911D"/>
+          </a:solidFill>
+          <a:ln>
+            <a:noFill/>
+          </a:ln>
+          <a:effectLst/>
+        </p:spPr>
+        <p:style>
+          <a:lnRef idx="1">
+            <a:schemeClr val="accent1"/>
+          </a:lnRef>
+          <a:fillRef idx="3">
+            <a:schemeClr val="accent1"/>
+          </a:fillRef>
+          <a:effectRef idx="2">
+            <a:schemeClr val="accent1"/>
+          </a:effectRef>
+          <a:fontRef idx="minor">
+            <a:schemeClr val="lt1"/>
+          </a:fontRef>
+        </p:style>
+        <p:txBody>
+          <a:bodyPr rtlCol="0" anchor="ctr"/>
+          <a:lstStyle/>
+          <a:p>
+            <a:pPr algn="ctr"/>
+          </a:p>
+        </p:txBody>
+      </p:sp>
+      <p:sp>
+        <p:nvSpPr>
+          <p:cNvPr id="3" name="TextBox 2"/>
+          <p:cNvSpPr txBox="1"/>
+          <p:nvPr/>
+        </p:nvSpPr>
+        <p:spPr>
+          <a:xfrm>
+            <a:off x="548640" y="502920"/>
+            <a:ext cx="502920" cy="502920"/>
+          </a:xfrm>
+          <a:prstGeom prst="rect">
+            <a:avLst/>
+          </a:prstGeom>
+          <a:noFill/>
+        </p:spPr>
+        <p:txBody>
+          <a:bodyPr wrap="square">
+            <a:spAutoFit/>
+          </a:bodyPr>
+          <a:lstStyle/>
+          <a:p>
+            <a:pPr algn="ctr"/>
+            <a:r>
+              <a:rPr sz="2000" b="0">
+                <a:solidFill>
+                  <a:srgbClr val="0A1F33"/>
+                </a:solidFill>
+                <a:latin typeface="Calibri"/>
+              </a:rPr>
+              <a:t>⚖</a:t>
+            </a:r>
+          </a:p>
+        </p:txBody>
+      </p:sp>
+      <p:sp>
+        <p:nvSpPr>
+          <p:cNvPr id="4" name="TextBox 3"/>
+          <p:cNvSpPr txBox="1"/>
+          <p:nvPr/>
+        </p:nvSpPr>
+        <p:spPr>
+          <a:xfrm>
+            <a:off x="1234440" y="530352"/>
+            <a:ext cx="9144000" cy="457200"/>
+          </a:xfrm>
+          <a:prstGeom prst="rect">
+            <a:avLst/>
+          </a:prstGeom>
+          <a:noFill/>
+        </p:spPr>
+        <p:txBody>
+          <a:bodyPr wrap="square">
+            <a:spAutoFit/>
+          </a:bodyPr>
+          <a:lstStyle/>
+          <a:p>
+            <a:r>
+              <a:rPr sz="1400" b="1">
+                <a:solidFill>
+                  <a:srgbClr val="DE911D"/>
+                </a:solidFill>
+                <a:latin typeface="Calibri"/>
+              </a:rPr>
+              <a:t>CONTENIDO PARA VER EN CLASE</a:t>
+            </a:r>
+          </a:p>
+        </p:txBody>
+      </p:sp>
+      <p:sp>
+        <p:nvSpPr>
+          <p:cNvPr id="5" name="TextBox 4"/>
+          <p:cNvSpPr txBox="1"/>
+          <p:nvPr/>
+        </p:nvSpPr>
+        <p:spPr>
+          <a:xfrm>
+            <a:off x="548640" y="1051560"/>
+            <a:ext cx="11064240" cy="822960"/>
+          </a:xfrm>
+          <a:prstGeom prst="rect">
+            <a:avLst/>
+          </a:prstGeom>
+          <a:noFill/>
+        </p:spPr>
+        <p:txBody>
+          <a:bodyPr wrap="square">
+            <a:spAutoFit/>
+          </a:bodyPr>
+          <a:lstStyle/>
+          <a:p>
+            <a:r>
+              <a:rPr sz="2600" b="1">
+                <a:solidFill>
+                  <a:srgbClr val="0A1F33"/>
+                </a:solidFill>
+                <a:latin typeface="Cambria"/>
+              </a:rPr>
+              <a:t>La normativa de los Juegos Deportivos Estudiantiles</a:t>
+            </a:r>
+          </a:p>
+        </p:txBody>
+      </p:sp>
+      <p:sp>
+        <p:nvSpPr>
+          <p:cNvPr id="6" name="Rectangle 5"/>
+          <p:cNvSpPr/>
+          <p:nvPr/>
+        </p:nvSpPr>
+        <p:spPr>
+          <a:xfrm>
+            <a:off x="548640" y="1874519"/>
+            <a:ext cx="11064240" cy="4389120"/>
+          </a:xfrm>
+          <a:prstGeom prst="rect">
+            <a:avLst/>
+          </a:prstGeom>
+          <a:solidFill>
+            <a:srgbClr val="F0F4F8"/>
+          </a:solidFill>
+          <a:ln>
+            <a:noFill/>
+          </a:ln>
+          <a:effectLst/>
+        </p:spPr>
+        <p:style>
+          <a:lnRef idx="1">
+            <a:schemeClr val="accent1"/>
+          </a:lnRef>
+          <a:fillRef idx="3">
+            <a:schemeClr val="accent1"/>
+          </a:fillRef>
+          <a:effectRef idx="2">
+            <a:schemeClr val="accent1"/>
+          </a:effectRef>
+          <a:fontRef idx="minor">
+            <a:schemeClr val="lt1"/>
+          </a:fontRef>
+        </p:style>
+        <p:txBody>
+          <a:bodyPr rtlCol="0" anchor="ctr"/>
+          <a:lstStyle/>
+          <a:p>
+            <a:pPr algn="ctr"/>
+          </a:p>
+        </p:txBody>
+      </p:sp>
+      <p:sp>
+        <p:nvSpPr>
+          <p:cNvPr id="7" name="TextBox 6"/>
+          <p:cNvSpPr txBox="1"/>
+          <p:nvPr/>
+        </p:nvSpPr>
+        <p:spPr>
+          <a:xfrm>
+            <a:off x="914400" y="2011680"/>
+            <a:ext cx="10332720" cy="1371600"/>
+          </a:xfrm>
+          <a:prstGeom prst="rect">
+            <a:avLst/>
+          </a:prstGeom>
+          <a:noFill/>
+        </p:spPr>
+        <p:txBody>
+          <a:bodyPr wrap="square">
+            <a:spAutoFit/>
+          </a:bodyPr>
+          <a:lstStyle/>
+          <a:p>
+            <a:r>
+              <a:rPr sz="1500" b="0">
+                <a:solidFill>
+                  <a:srgbClr val="0A1F33"/>
+                </a:solidFill>
+                <a:latin typeface="Calibri"/>
+              </a:rPr>
+              <a:t>Cada edición de los JDE publica su normativa, con reglas generales para todos los deportes y un apartado propio del ajedrez. Antes de cada torneo, quien arbitra debe leer la versión vigente y dejar anotado lo que va a aplicar en la sala. Cuando la normativa no dice algo, se aplican las Leyes de la FIDE.</a:t>
+            </a:r>
+          </a:p>
+        </p:txBody>
+      </p:sp>
+      <p:sp>
+        <p:nvSpPr>
+          <p:cNvPr id="8" name="TextBox 7"/>
+          <p:cNvSpPr txBox="1"/>
+          <p:nvPr/>
+        </p:nvSpPr>
+        <p:spPr>
+          <a:xfrm>
+            <a:off x="914400" y="3429000"/>
+            <a:ext cx="10332720" cy="2743200"/>
+          </a:xfrm>
+          <a:prstGeom prst="rect">
+            <a:avLst/>
+          </a:prstGeom>
+          <a:noFill/>
+        </p:spPr>
+        <p:txBody>
+          <a:bodyPr wrap="square">
+            <a:spAutoFit/>
+          </a:bodyPr>
+          <a:lstStyle/>
+          <a:p>
+            <a:pPr>
+              <a:spcAft>
+                <a:spcPts val="800"/>
+              </a:spcAft>
+            </a:pPr>
+            <a:r>
+              <a:rPr sz="1500">
+                <a:solidFill>
+                  <a:srgbClr val="334E68"/>
+                </a:solidFill>
+                <a:latin typeface="Calibri"/>
+              </a:rPr>
+              <a:t>•  Categorías, edades y ramas; requisitos y documentos de inscripción.</a:t>
+            </a:r>
+          </a:p>
+          <a:p>
+            <a:pPr>
+              <a:spcAft>
+                <a:spcPts val="800"/>
+              </a:spcAft>
+            </a:pPr>
+            <a:r>
+              <a:rPr sz="1500">
+                <a:solidFill>
+                  <a:srgbClr val="334E68"/>
+                </a:solidFill>
+                <a:latin typeface="Calibri"/>
+              </a:rPr>
+              <a:t>•  Modalidad (individual o por equipos), sistema de competencia y número de rondas.</a:t>
+            </a:r>
+          </a:p>
+          <a:p>
+            <a:pPr>
+              <a:spcAft>
+                <a:spcPts val="800"/>
+              </a:spcAft>
+            </a:pPr>
+            <a:r>
+              <a:rPr sz="1500">
+                <a:solidFill>
+                  <a:srgbClr val="334E68"/>
+                </a:solidFill>
+                <a:latin typeface="Calibri"/>
+              </a:rPr>
+              <a:t>•  Ritmo de juego y tiempo de incomparecencia.</a:t>
+            </a:r>
+          </a:p>
+          <a:p>
+            <a:pPr>
+              <a:spcAft>
+                <a:spcPts val="800"/>
+              </a:spcAft>
+            </a:pPr>
+            <a:r>
+              <a:rPr sz="1500">
+                <a:solidFill>
+                  <a:srgbClr val="334E68"/>
+                </a:solidFill>
+                <a:latin typeface="Calibri"/>
+              </a:rPr>
+              <a:t>•  Desempates y su orden.</a:t>
+            </a:r>
+          </a:p>
+          <a:p>
+            <a:pPr>
+              <a:spcAft>
+                <a:spcPts val="800"/>
+              </a:spcAft>
+            </a:pPr>
+            <a:r>
+              <a:rPr sz="1500">
+                <a:solidFill>
+                  <a:srgbClr val="334E68"/>
+                </a:solidFill>
+                <a:latin typeface="Calibri"/>
+              </a:rPr>
+              <a:t>•  Dispositivos electrónicos, conducta y sanciones propias del evento.</a:t>
+            </a:r>
+          </a:p>
+          <a:p>
+            <a:pPr>
+              <a:spcAft>
+                <a:spcPts val="800"/>
+              </a:spcAft>
+            </a:pPr>
+            <a:r>
+              <a:rPr sz="1500">
+                <a:solidFill>
+                  <a:srgbClr val="334E68"/>
+                </a:solidFill>
+                <a:latin typeface="Calibri"/>
+              </a:rPr>
+              <a:t>•  Reclamos y apelaciones: ante quién, en qué plazo y con qué requisitos.</a:t>
+            </a:r>
+          </a:p>
+        </p:txBody>
+      </p:sp>
+      <p:sp>
+        <p:nvSpPr>
+          <p:cNvPr id="9" name="TextBox 8"/>
+          <p:cNvSpPr txBox="1"/>
+          <p:nvPr/>
+        </p:nvSpPr>
+        <p:spPr>
+          <a:xfrm>
+            <a:off x="548640" y="6355080"/>
+            <a:ext cx="11064240" cy="365760"/>
+          </a:xfrm>
+          <a:prstGeom prst="rect">
+            <a:avLst/>
+          </a:prstGeom>
+          <a:noFill/>
+        </p:spPr>
+        <p:txBody>
+          <a:bodyPr wrap="square">
+            <a:spAutoFit/>
+          </a:bodyPr>
+          <a:lstStyle/>
+          <a:p>
+            <a:r>
+              <a:rPr sz="1100" b="0">
+                <a:solidFill>
+                  <a:srgbClr val="627D98"/>
+                </a:solidFill>
+                <a:latin typeface="Calibri"/>
+              </a:rPr>
+              <a:t>Fuente: Normativa vigente de los Juegos Deportivos Estudiantiles (edición del año en curso)</a:t>
+            </a:r>
+          </a:p>
+        </p:txBody>
+      </p:sp>
+    </p:spTree>
+  </p:cSld>
+  <p:clrMapOvr>
+    <a:masterClrMapping/>
+  </p:clrMapOvr>
+</p:sld>
+</file>
+
+<file path=ppt/slides/slide9.xml><?xml version="1.0" encoding="utf-8"?>
+<p:sld xmlns:a="http://schemas.openxmlformats.org/drawingml/2006/main" xmlns:p="http://schemas.openxmlformats.org/presentationml/2006/main" xmlns:r="http://schemas.openxmlformats.org/officeDocument/2006/relationships">
+  <p:cSld>
+    <p:spTree>
+      <p:nvGrpSpPr>
+        <p:cNvPr id="1" name=""/>
+        <p:cNvGrpSpPr/>
+        <p:nvPr/>
+      </p:nvGrpSpPr>
+      <p:grpSpPr/>
+      <p:sp>
+        <p:nvSpPr>
+          <p:cNvPr id="2" name="Oval 1"/>
+          <p:cNvSpPr/>
+          <p:nvPr/>
+        </p:nvSpPr>
+        <p:spPr>
+          <a:xfrm>
+            <a:off x="548640" y="502920"/>
+            <a:ext cx="502920" cy="502920"/>
+          </a:xfrm>
+          <a:prstGeom prst="ellipse">
+            <a:avLst/>
+          </a:prstGeom>
+          <a:solidFill>
+            <a:srgbClr val="DE911D"/>
+          </a:solidFill>
+          <a:ln>
+            <a:noFill/>
+          </a:ln>
+          <a:effectLst/>
+        </p:spPr>
+        <p:style>
+          <a:lnRef idx="1">
+            <a:schemeClr val="accent1"/>
+          </a:lnRef>
+          <a:fillRef idx="3">
+            <a:schemeClr val="accent1"/>
+          </a:fillRef>
+          <a:effectRef idx="2">
+            <a:schemeClr val="accent1"/>
+          </a:effectRef>
+          <a:fontRef idx="minor">
+            <a:schemeClr val="lt1"/>
+          </a:fontRef>
+        </p:style>
+        <p:txBody>
+          <a:bodyPr rtlCol="0" anchor="ctr"/>
+          <a:lstStyle/>
+          <a:p>
+            <a:pPr algn="ctr"/>
+          </a:p>
+        </p:txBody>
+      </p:sp>
+      <p:sp>
+        <p:nvSpPr>
+          <p:cNvPr id="3" name="TextBox 2"/>
+          <p:cNvSpPr txBox="1"/>
+          <p:nvPr/>
+        </p:nvSpPr>
+        <p:spPr>
+          <a:xfrm>
+            <a:off x="548640" y="502920"/>
+            <a:ext cx="502920" cy="502920"/>
+          </a:xfrm>
+          <a:prstGeom prst="rect">
+            <a:avLst/>
+          </a:prstGeom>
+          <a:noFill/>
+        </p:spPr>
+        <p:txBody>
+          <a:bodyPr wrap="square">
+            <a:spAutoFit/>
+          </a:bodyPr>
+          <a:lstStyle/>
+          <a:p>
+            <a:pPr algn="ctr"/>
+            <a:r>
+              <a:rPr sz="2000" b="0">
+                <a:solidFill>
+                  <a:srgbClr val="0A1F33"/>
+                </a:solidFill>
+                <a:latin typeface="Calibri"/>
+              </a:rPr>
+              <a:t>?</a:t>
+            </a:r>
+          </a:p>
+        </p:txBody>
+      </p:sp>
+      <p:sp>
+        <p:nvSpPr>
+          <p:cNvPr id="4" name="TextBox 3"/>
+          <p:cNvSpPr txBox="1"/>
+          <p:nvPr/>
+        </p:nvSpPr>
+        <p:spPr>
+          <a:xfrm>
+            <a:off x="1234440" y="530352"/>
+            <a:ext cx="9144000" cy="457200"/>
+          </a:xfrm>
+          <a:prstGeom prst="rect">
+            <a:avLst/>
+          </a:prstGeom>
+          <a:noFill/>
+        </p:spPr>
+        <p:txBody>
+          <a:bodyPr wrap="square">
+            <a:spAutoFit/>
+          </a:bodyPr>
+          <a:lstStyle/>
+          <a:p>
+            <a:r>
+              <a:rPr sz="1400" b="1">
+                <a:solidFill>
+                  <a:srgbClr val="DE911D"/>
+                </a:solidFill>
+                <a:latin typeface="Calibri"/>
+              </a:rPr>
+              <a:t>CASO 1 · ¿QUÉ DECIDE LA PERSONA ÁRBITRA?</a:t>
+            </a:r>
+          </a:p>
+        </p:txBody>
+      </p:sp>
+      <p:sp>
+        <p:nvSpPr>
+          <p:cNvPr id="5" name="TextBox 4"/>
+          <p:cNvSpPr txBox="1"/>
+          <p:nvPr/>
+        </p:nvSpPr>
+        <p:spPr>
+          <a:xfrm>
+            <a:off x="548640" y="1051560"/>
+            <a:ext cx="11064240" cy="822960"/>
+          </a:xfrm>
+          <a:prstGeom prst="rect">
+            <a:avLst/>
+          </a:prstGeom>
+          <a:noFill/>
+        </p:spPr>
+        <p:txBody>
+          <a:bodyPr wrap="square">
+            <a:spAutoFit/>
+          </a:bodyPr>
+          <a:lstStyle/>
+          <a:p>
+            <a:r>
+              <a:rPr sz="2600" b="1">
+                <a:solidFill>
+                  <a:srgbClr val="0A1F33"/>
+                </a:solidFill>
+                <a:latin typeface="Cambria"/>
+              </a:rPr>
+              <a:t>¿Rápidas o relámpago?</a:t>
+            </a:r>
+          </a:p>
+        </p:txBody>
+      </p:sp>
+      <p:sp>
+        <p:nvSpPr>
+          <p:cNvPr id="6" name="Rectangle 5"/>
+          <p:cNvSpPr/>
+          <p:nvPr/>
+        </p:nvSpPr>
+        <p:spPr>
+          <a:xfrm>
+            <a:off x="548640" y="1965960"/>
+            <a:ext cx="11064240" cy="4206240"/>
+          </a:xfrm>
+          <a:prstGeom prst="rect">
+            <a:avLst/>
+          </a:prstGeom>
+          <a:solidFill>
+            <a:srgbClr val="F0F4F8"/>
+          </a:solidFill>
+          <a:ln>
+            <a:noFill/>
+          </a:ln>
+          <a:effectLst/>
+        </p:spPr>
+        <p:style>
+          <a:lnRef idx="1">
+            <a:schemeClr val="accent1"/>
+          </a:lnRef>
+          <a:fillRef idx="3">
+            <a:schemeClr val="accent1"/>
+          </a:fillRef>
+          <a:effectRef idx="2">
+            <a:schemeClr val="accent1"/>
+          </a:effectRef>
+          <a:fontRef idx="minor">
+            <a:schemeClr val="lt1"/>
+          </a:fontRef>
+        </p:style>
+        <p:txBody>
+          <a:bodyPr rtlCol="0" anchor="ctr"/>
+          <a:lstStyle/>
+          <a:p>
+            <a:pPr algn="ctr"/>
+          </a:p>
+        </p:txBody>
+      </p:sp>
+      <p:sp>
+        <p:nvSpPr>
+          <p:cNvPr id="7" name="TextBox 6"/>
+          <p:cNvSpPr txBox="1"/>
+          <p:nvPr/>
+        </p:nvSpPr>
+        <p:spPr>
+          <a:xfrm>
+            <a:off x="914400" y="2240280"/>
+            <a:ext cx="10332720" cy="3749039"/>
+          </a:xfrm>
+          <a:prstGeom prst="rect">
+            <a:avLst/>
+          </a:prstGeom>
+          <a:noFill/>
+        </p:spPr>
+        <p:txBody>
+          <a:bodyPr wrap="square">
+            <a:spAutoFit/>
+          </a:bodyPr>
+          <a:lstStyle/>
+          <a:p>
+            <a:r>
+              <a:rPr sz="2000" b="0">
+                <a:solidFill>
+                  <a:srgbClr val="334E68"/>
+                </a:solidFill>
+                <a:latin typeface="Calibri"/>
+              </a:rPr>
+              <a:t>Un torneo escolar se anuncia a 5 minutos más 3 segundos por jugada.</a:t>
             </a:r>
           </a:p>
         </p:txBody>

--- a/cursos/recursos/formacion-ajedrez/03-apendices-y-normativa-jde.pptx
+++ b/cursos/recursos/formacion-ajedrez/03-apendices-y-normativa-jde.pptx
@@ -6194,7 +6194,7 @@
               </a:spcAft>
             </a:pPr>
             <a:r>
-              <a:rPr sz="1400">
+              <a:rPr sz="1200">
                 <a:solidFill>
                   <a:srgbClr val="334E68"/>
                 </a:solidFill>
@@ -6210,7 +6210,7 @@
               </a:spcAft>
             </a:pPr>
             <a:r>
-              <a:rPr sz="1400">
+              <a:rPr sz="1200">
                 <a:solidFill>
                   <a:srgbClr val="334E68"/>
                 </a:solidFill>
@@ -6226,7 +6226,7 @@
               </a:spcAft>
             </a:pPr>
             <a:r>
-              <a:rPr sz="1400">
+              <a:rPr sz="1200">
                 <a:solidFill>
                   <a:srgbClr val="334E68"/>
                 </a:solidFill>
@@ -6242,7 +6242,7 @@
               </a:spcAft>
             </a:pPr>
             <a:r>
-              <a:rPr sz="1400">
+              <a:rPr sz="1200">
                 <a:solidFill>
                   <a:srgbClr val="334E68"/>
                 </a:solidFill>
@@ -6258,7 +6258,7 @@
               </a:spcAft>
             </a:pPr>
             <a:r>
-              <a:rPr sz="1400">
+              <a:rPr sz="1200">
                 <a:solidFill>
                   <a:srgbClr val="334E68"/>
                 </a:solidFill>
@@ -6274,13 +6274,93 @@
               </a:spcAft>
             </a:pPr>
             <a:r>
-              <a:rPr sz="1400">
+              <a:rPr sz="1200">
                 <a:solidFill>
                   <a:srgbClr val="334E68"/>
                 </a:solidFill>
                 <a:latin typeface="Calibri"/>
               </a:rPr>
               <a:t>6. En rápidas, ¿es obligatorio anotar las jugadas?</a:t>
+            </a:r>
+          </a:p>
+          <a:p>
+            <a:pPr>
+              <a:spcAft>
+                <a:spcPts val="600"/>
+              </a:spcAft>
+            </a:pPr>
+            <a:r>
+              <a:rPr sz="1200">
+                <a:solidFill>
+                  <a:srgbClr val="334E68"/>
+                </a:solidFill>
+                <a:latin typeface="Calibri"/>
+              </a:rPr>
+              <a:t>7. En ajedrez relámpago sin supervisión adecuada, ¿quién reclama la caída de una bandera?</a:t>
+            </a:r>
+          </a:p>
+          <a:p>
+            <a:pPr>
+              <a:spcAft>
+                <a:spcPts val="600"/>
+              </a:spcAft>
+            </a:pPr>
+            <a:r>
+              <a:rPr sz="1200">
+                <a:solidFill>
+                  <a:srgbClr val="334E68"/>
+                </a:solidFill>
+                <a:latin typeface="Calibri"/>
+              </a:rPr>
+              <a:t>8. Sin supervisión adecuada, pasadas 10 jugadas de cada bando, ¿se puede reclamar por un tablero mal orientado?</a:t>
+            </a:r>
+          </a:p>
+          <a:p>
+            <a:pPr>
+              <a:spcAft>
+                <a:spcPts val="600"/>
+              </a:spcAft>
+            </a:pPr>
+            <a:r>
+              <a:rPr sz="1200">
+                <a:solidFill>
+                  <a:srgbClr val="334E68"/>
+                </a:solidFill>
+                <a:latin typeface="Calibri"/>
+              </a:rPr>
+              <a:t>9. Si la normativa vigente de los JDE no regula algo, por ejemplo el tiempo de incomparecencia, ¿qué se aplica?</a:t>
+            </a:r>
+          </a:p>
+          <a:p>
+            <a:pPr>
+              <a:spcAft>
+                <a:spcPts val="600"/>
+              </a:spcAft>
+            </a:pPr>
+            <a:r>
+              <a:rPr sz="1200">
+                <a:solidFill>
+                  <a:srgbClr val="334E68"/>
+                </a:solidFill>
+                <a:latin typeface="Calibri"/>
+              </a:rPr>
+              <a:t>10. El encuentro directo no separa a dos jugadores empatados porque no se enfrentaron entre sí. ¿Qué corresponde?</a:t>
+            </a:r>
+          </a:p>
+          <a:p>
+            <a:pPr>
+              <a:spcAft>
+                <a:spcPts val="600"/>
+              </a:spcAft>
+            </a:pPr>
+            <a:r>
+              <a:rPr sz="1200">
+                <a:solidFill>
+                  <a:srgbClr val="334E68"/>
+                </a:solidFill>
+                <a:latin typeface="Calibri"/>
+              </a:rPr>
+              <a:t>11. En relámpago, un jugador da mate y un instante después cae su propia bandera. ¿Quién gana?</a:t>
             </a:r>
           </a:p>
         </p:txBody>
